--- a/ENTREGA FINAL/4. Diagramas de secuencia/Marc Sala.pptx
+++ b/ENTREGA FINAL/4. Diagramas de secuencia/Marc Sala.pptx
@@ -5,25 +5,23 @@
     <p:sldMasterId id="2147483660" r:id="rId4"/>
   </p:sldMasterIdLst>
   <p:notesMasterIdLst>
-    <p:notesMasterId r:id="rId21"/>
+    <p:notesMasterId r:id="rId19"/>
   </p:notesMasterIdLst>
   <p:sldIdLst>
-    <p:sldId id="420" r:id="rId5"/>
-    <p:sldId id="421" r:id="rId6"/>
-    <p:sldId id="452" r:id="rId7"/>
-    <p:sldId id="453" r:id="rId8"/>
-    <p:sldId id="454" r:id="rId9"/>
-    <p:sldId id="455" r:id="rId10"/>
-    <p:sldId id="456" r:id="rId11"/>
-    <p:sldId id="457" r:id="rId12"/>
-    <p:sldId id="473" r:id="rId13"/>
-    <p:sldId id="474" r:id="rId14"/>
-    <p:sldId id="450" r:id="rId15"/>
-    <p:sldId id="451" r:id="rId16"/>
-    <p:sldId id="475" r:id="rId17"/>
-    <p:sldId id="476" r:id="rId18"/>
-    <p:sldId id="477" r:id="rId19"/>
-    <p:sldId id="478" r:id="rId20"/>
+    <p:sldId id="452" r:id="rId5"/>
+    <p:sldId id="453" r:id="rId6"/>
+    <p:sldId id="454" r:id="rId7"/>
+    <p:sldId id="455" r:id="rId8"/>
+    <p:sldId id="456" r:id="rId9"/>
+    <p:sldId id="457" r:id="rId10"/>
+    <p:sldId id="473" r:id="rId11"/>
+    <p:sldId id="474" r:id="rId12"/>
+    <p:sldId id="450" r:id="rId13"/>
+    <p:sldId id="451" r:id="rId14"/>
+    <p:sldId id="475" r:id="rId15"/>
+    <p:sldId id="476" r:id="rId16"/>
+    <p:sldId id="477" r:id="rId17"/>
+    <p:sldId id="478" r:id="rId18"/>
   </p:sldIdLst>
   <p:sldSz cx="12192000" cy="6858000"/>
   <p:notesSz cx="6858000" cy="9144000"/>
@@ -5436,7 +5434,7 @@
         <p:cNvPr id="1" name="">
           <a:extLst>
             <a:ext uri="{FF2B5EF4-FFF2-40B4-BE49-F238E27FC236}">
-              <a16:creationId xmlns:a16="http://schemas.microsoft.com/office/drawing/2014/main" id="{26CA6FD9-2785-3696-550C-FB5BDA4BA01F}"/>
+              <a16:creationId xmlns:a16="http://schemas.microsoft.com/office/drawing/2014/main" id="{8B9A2214-28AD-53CC-C129-770909414F2B}"/>
             </a:ext>
           </a:extLst>
         </p:cNvPr>
@@ -5456,7 +5454,7 @@
           <p:cNvPr id="2" name="Título 1">
             <a:extLst>
               <a:ext uri="{FF2B5EF4-FFF2-40B4-BE49-F238E27FC236}">
-                <a16:creationId xmlns:a16="http://schemas.microsoft.com/office/drawing/2014/main" id="{71580E25-DDA2-F6F1-A103-A5A12D714677}"/>
+                <a16:creationId xmlns:a16="http://schemas.microsoft.com/office/drawing/2014/main" id="{A5AF6B09-6469-4C1D-2F19-0B86AED03750}"/>
               </a:ext>
             </a:extLst>
           </p:cNvPr>
@@ -5469,14 +5467,12 @@
         </p:nvSpPr>
         <p:spPr/>
         <p:txBody>
-          <a:bodyPr>
-            <a:normAutofit/>
-          </a:bodyPr>
+          <a:bodyPr/>
           <a:lstStyle/>
           <a:p>
             <a:r>
               <a:rPr lang="ca-ES" dirty="0"/>
-              <a:t>Acceptar comandes a repartir</a:t>
+              <a:t>Valorar comandes</a:t>
             </a:r>
           </a:p>
         </p:txBody>
@@ -5486,7 +5482,7 @@
           <p:cNvPr id="4" name="Marcador de número de diapositiva 3">
             <a:extLst>
               <a:ext uri="{FF2B5EF4-FFF2-40B4-BE49-F238E27FC236}">
-                <a16:creationId xmlns:a16="http://schemas.microsoft.com/office/drawing/2014/main" id="{B47792F6-17D1-2951-CF19-C22D0E1E889C}"/>
+                <a16:creationId xmlns:a16="http://schemas.microsoft.com/office/drawing/2014/main" id="{F480ACCD-DB47-CB81-820C-83FD31056D8C}"/>
               </a:ext>
             </a:extLst>
           </p:cNvPr>
@@ -5512,10 +5508,10 @@
       </p:sp>
       <p:pic>
         <p:nvPicPr>
-          <p:cNvPr id="6" name="Imagen 5">
-            <a:extLst>
-              <a:ext uri="{FF2B5EF4-FFF2-40B4-BE49-F238E27FC236}">
-                <a16:creationId xmlns:a16="http://schemas.microsoft.com/office/drawing/2014/main" id="{D4A06A75-A3FE-69DB-D216-FCBF170FA1D4}"/>
+          <p:cNvPr id="5" name="Imagen 4">
+            <a:extLst>
+              <a:ext uri="{FF2B5EF4-FFF2-40B4-BE49-F238E27FC236}">
+                <a16:creationId xmlns:a16="http://schemas.microsoft.com/office/drawing/2014/main" id="{E7E8D3AC-B2F0-31A3-3BDA-FC19777F5BF3}"/>
               </a:ext>
             </a:extLst>
           </p:cNvPr>
@@ -5532,8 +5528,8 @@
         </p:blipFill>
         <p:spPr>
           <a:xfrm>
-            <a:off x="3733470" y="2223485"/>
-            <a:ext cx="4725059" cy="4315427"/>
+            <a:off x="3742996" y="2104362"/>
+            <a:ext cx="4706007" cy="4753638"/>
           </a:xfrm>
           <a:prstGeom prst="rect">
             <a:avLst/>
@@ -5543,7 +5539,7 @@
     </p:spTree>
     <p:extLst>
       <p:ext uri="{BB962C8B-B14F-4D97-AF65-F5344CB8AC3E}">
-        <p14:creationId xmlns:p14="http://schemas.microsoft.com/office/powerpoint/2010/main" val="1685547447"/>
+        <p14:creationId xmlns:p14="http://schemas.microsoft.com/office/powerpoint/2010/main" val="3425358888"/>
       </p:ext>
     </p:extLst>
   </p:cSld>
@@ -5554,6 +5550,1449 @@
 </file>
 
 <file path=ppt/slides/slide10.xml><?xml version="1.0" encoding="utf-8"?>
+<p:sld xmlns:a="http://schemas.openxmlformats.org/drawingml/2006/main" xmlns:r="http://schemas.openxmlformats.org/officeDocument/2006/relationships" xmlns:p="http://schemas.openxmlformats.org/presentationml/2006/main">
+  <p:cSld>
+    <p:spTree>
+      <p:nvGrpSpPr>
+        <p:cNvPr id="1" name="">
+          <a:extLst>
+            <a:ext uri="{FF2B5EF4-FFF2-40B4-BE49-F238E27FC236}">
+              <a16:creationId xmlns:a16="http://schemas.microsoft.com/office/drawing/2014/main" id="{428E3AF3-6A15-8717-C4B1-A956B5916EAD}"/>
+            </a:ext>
+          </a:extLst>
+        </p:cNvPr>
+        <p:cNvGrpSpPr/>
+        <p:nvPr/>
+      </p:nvGrpSpPr>
+      <p:grpSpPr>
+        <a:xfrm>
+          <a:off x="0" y="0"/>
+          <a:ext cx="0" cy="0"/>
+          <a:chOff x="0" y="0"/>
+          <a:chExt cx="0" cy="0"/>
+        </a:xfrm>
+      </p:grpSpPr>
+      <p:sp>
+        <p:nvSpPr>
+          <p:cNvPr id="4" name="Marcador de número de diapositiva 3">
+            <a:extLst>
+              <a:ext uri="{FF2B5EF4-FFF2-40B4-BE49-F238E27FC236}">
+                <a16:creationId xmlns:a16="http://schemas.microsoft.com/office/drawing/2014/main" id="{84F5E553-D943-433A-BC33-728AA510286C}"/>
+              </a:ext>
+            </a:extLst>
+          </p:cNvPr>
+          <p:cNvSpPr>
+            <a:spLocks noGrp="1"/>
+          </p:cNvSpPr>
+          <p:nvPr>
+            <p:ph type="sldNum" sz="quarter" idx="12"/>
+          </p:nvPr>
+        </p:nvSpPr>
+        <p:spPr/>
+        <p:txBody>
+          <a:bodyPr/>
+          <a:lstStyle/>
+          <a:p>
+            <a:fld id="{B2DC25EE-239B-4C5F-AAD1-255A7D5F1EE2}" type="slidenum">
+              <a:rPr lang="en-US" smtClean="0"/>
+              <a:t>10</a:t>
+            </a:fld>
+            <a:endParaRPr lang="en-US" dirty="0"/>
+          </a:p>
+        </p:txBody>
+      </p:sp>
+      <p:sp>
+        <p:nvSpPr>
+          <p:cNvPr id="14" name="CuadroTexto 13">
+            <a:extLst>
+              <a:ext uri="{FF2B5EF4-FFF2-40B4-BE49-F238E27FC236}">
+                <a16:creationId xmlns:a16="http://schemas.microsoft.com/office/drawing/2014/main" id="{851A5A20-1BAF-67D2-D56E-F9672D70431F}"/>
+              </a:ext>
+            </a:extLst>
+          </p:cNvPr>
+          <p:cNvSpPr txBox="1"/>
+          <p:nvPr/>
+        </p:nvSpPr>
+        <p:spPr>
+          <a:xfrm>
+            <a:off x="428603" y="2198728"/>
+            <a:ext cx="11266092" cy="646331"/>
+          </a:xfrm>
+          <a:prstGeom prst="rect">
+            <a:avLst/>
+          </a:prstGeom>
+          <a:noFill/>
+        </p:spPr>
+        <p:txBody>
+          <a:bodyPr wrap="square" rtlCol="0">
+            <a:spAutoFit/>
+          </a:bodyPr>
+          <a:lstStyle/>
+          <a:p>
+            <a:pPr algn="just"/>
+            <a:endParaRPr lang="ca-ES" dirty="0"/>
+          </a:p>
+          <a:p>
+            <a:pPr algn="just"/>
+            <a:endParaRPr lang="ca-ES" dirty="0"/>
+          </a:p>
+        </p:txBody>
+      </p:sp>
+      <p:pic>
+        <p:nvPicPr>
+          <p:cNvPr id="5" name="Imagen 4">
+            <a:extLst>
+              <a:ext uri="{FF2B5EF4-FFF2-40B4-BE49-F238E27FC236}">
+                <a16:creationId xmlns:a16="http://schemas.microsoft.com/office/drawing/2014/main" id="{19749D88-7983-AF89-9570-60669988DFDE}"/>
+              </a:ext>
+            </a:extLst>
+          </p:cNvPr>
+          <p:cNvPicPr>
+            <a:picLocks noChangeAspect="1"/>
+          </p:cNvPicPr>
+          <p:nvPr/>
+        </p:nvPicPr>
+        <p:blipFill>
+          <a:blip r:embed="rId2">
+            <a:extLst>
+              <a:ext uri="{28A0092B-C50C-407E-A947-70E740481C1C}">
+                <a14:useLocalDpi xmlns:a14="http://schemas.microsoft.com/office/drawing/2010/main" val="0"/>
+              </a:ext>
+            </a:extLst>
+          </a:blip>
+          <a:stretch>
+            <a:fillRect/>
+          </a:stretch>
+        </p:blipFill>
+        <p:spPr>
+          <a:xfrm>
+            <a:off x="0" y="509218"/>
+            <a:ext cx="12192000" cy="5839563"/>
+          </a:xfrm>
+          <a:prstGeom prst="rect">
+            <a:avLst/>
+          </a:prstGeom>
+        </p:spPr>
+      </p:pic>
+    </p:spTree>
+    <p:extLst>
+      <p:ext uri="{BB962C8B-B14F-4D97-AF65-F5344CB8AC3E}">
+        <p14:creationId xmlns:p14="http://schemas.microsoft.com/office/powerpoint/2010/main" val="2745002148"/>
+      </p:ext>
+    </p:extLst>
+  </p:cSld>
+  <p:clrMapOvr>
+    <a:masterClrMapping/>
+  </p:clrMapOvr>
+</p:sld>
+</file>
+
+<file path=ppt/slides/slide11.xml><?xml version="1.0" encoding="utf-8"?>
+<p:sld xmlns:a="http://schemas.openxmlformats.org/drawingml/2006/main" xmlns:r="http://schemas.openxmlformats.org/officeDocument/2006/relationships" xmlns:p="http://schemas.openxmlformats.org/presentationml/2006/main">
+  <p:cSld>
+    <p:spTree>
+      <p:nvGrpSpPr>
+        <p:cNvPr id="1" name="">
+          <a:extLst>
+            <a:ext uri="{FF2B5EF4-FFF2-40B4-BE49-F238E27FC236}">
+              <a16:creationId xmlns:a16="http://schemas.microsoft.com/office/drawing/2014/main" id="{3632C1A4-C051-D310-F6C5-C2307EDDFF82}"/>
+            </a:ext>
+          </a:extLst>
+        </p:cNvPr>
+        <p:cNvGrpSpPr/>
+        <p:nvPr/>
+      </p:nvGrpSpPr>
+      <p:grpSpPr>
+        <a:xfrm>
+          <a:off x="0" y="0"/>
+          <a:ext cx="0" cy="0"/>
+          <a:chOff x="0" y="0"/>
+          <a:chExt cx="0" cy="0"/>
+        </a:xfrm>
+      </p:grpSpPr>
+      <p:sp>
+        <p:nvSpPr>
+          <p:cNvPr id="2" name="Título 1">
+            <a:extLst>
+              <a:ext uri="{FF2B5EF4-FFF2-40B4-BE49-F238E27FC236}">
+                <a16:creationId xmlns:a16="http://schemas.microsoft.com/office/drawing/2014/main" id="{A475A83C-4876-383E-ACED-D3B8852D534D}"/>
+              </a:ext>
+            </a:extLst>
+          </p:cNvPr>
+          <p:cNvSpPr>
+            <a:spLocks noGrp="1"/>
+          </p:cNvSpPr>
+          <p:nvPr>
+            <p:ph type="title"/>
+          </p:nvPr>
+        </p:nvSpPr>
+        <p:spPr/>
+        <p:txBody>
+          <a:bodyPr/>
+          <a:lstStyle/>
+          <a:p>
+            <a:r>
+              <a:rPr lang="ca-ES" dirty="0"/>
+              <a:t>Veure comandes pendents a repartir</a:t>
+            </a:r>
+          </a:p>
+        </p:txBody>
+      </p:sp>
+      <p:sp>
+        <p:nvSpPr>
+          <p:cNvPr id="4" name="Marcador de número de diapositiva 3">
+            <a:extLst>
+              <a:ext uri="{FF2B5EF4-FFF2-40B4-BE49-F238E27FC236}">
+                <a16:creationId xmlns:a16="http://schemas.microsoft.com/office/drawing/2014/main" id="{589FB742-A7AE-853F-C06A-D0915B918EEB}"/>
+              </a:ext>
+            </a:extLst>
+          </p:cNvPr>
+          <p:cNvSpPr>
+            <a:spLocks noGrp="1"/>
+          </p:cNvSpPr>
+          <p:nvPr>
+            <p:ph type="sldNum" sz="quarter" idx="12"/>
+          </p:nvPr>
+        </p:nvSpPr>
+        <p:spPr/>
+        <p:txBody>
+          <a:bodyPr/>
+          <a:lstStyle/>
+          <a:p>
+            <a:fld id="{B2DC25EE-239B-4C5F-AAD1-255A7D5F1EE2}" type="slidenum">
+              <a:rPr lang="en-US" smtClean="0"/>
+              <a:t>11</a:t>
+            </a:fld>
+            <a:endParaRPr lang="en-US" dirty="0"/>
+          </a:p>
+        </p:txBody>
+      </p:sp>
+      <p:pic>
+        <p:nvPicPr>
+          <p:cNvPr id="8" name="Imagen 7">
+            <a:extLst>
+              <a:ext uri="{FF2B5EF4-FFF2-40B4-BE49-F238E27FC236}">
+                <a16:creationId xmlns:a16="http://schemas.microsoft.com/office/drawing/2014/main" id="{41C7423A-8AC5-93F8-3F4D-9579336792CB}"/>
+              </a:ext>
+            </a:extLst>
+          </p:cNvPr>
+          <p:cNvPicPr>
+            <a:picLocks noChangeAspect="1"/>
+          </p:cNvPicPr>
+          <p:nvPr/>
+        </p:nvPicPr>
+        <p:blipFill>
+          <a:blip r:embed="rId2"/>
+          <a:stretch>
+            <a:fillRect/>
+          </a:stretch>
+        </p:blipFill>
+        <p:spPr>
+          <a:xfrm>
+            <a:off x="3651505" y="2332689"/>
+            <a:ext cx="4706007" cy="4305901"/>
+          </a:xfrm>
+          <a:prstGeom prst="rect">
+            <a:avLst/>
+          </a:prstGeom>
+        </p:spPr>
+      </p:pic>
+    </p:spTree>
+    <p:extLst>
+      <p:ext uri="{BB962C8B-B14F-4D97-AF65-F5344CB8AC3E}">
+        <p14:creationId xmlns:p14="http://schemas.microsoft.com/office/powerpoint/2010/main" val="1330446890"/>
+      </p:ext>
+    </p:extLst>
+  </p:cSld>
+  <p:clrMapOvr>
+    <a:masterClrMapping/>
+  </p:clrMapOvr>
+</p:sld>
+</file>
+
+<file path=ppt/slides/slide12.xml><?xml version="1.0" encoding="utf-8"?>
+<p:sld xmlns:a="http://schemas.openxmlformats.org/drawingml/2006/main" xmlns:r="http://schemas.openxmlformats.org/officeDocument/2006/relationships" xmlns:p="http://schemas.openxmlformats.org/presentationml/2006/main">
+  <p:cSld>
+    <p:spTree>
+      <p:nvGrpSpPr>
+        <p:cNvPr id="1" name="">
+          <a:extLst>
+            <a:ext uri="{FF2B5EF4-FFF2-40B4-BE49-F238E27FC236}">
+              <a16:creationId xmlns:a16="http://schemas.microsoft.com/office/drawing/2014/main" id="{47BE24D0-7BBA-FABD-5CBA-1AD3D9080EEC}"/>
+            </a:ext>
+          </a:extLst>
+        </p:cNvPr>
+        <p:cNvGrpSpPr/>
+        <p:nvPr/>
+      </p:nvGrpSpPr>
+      <p:grpSpPr>
+        <a:xfrm>
+          <a:off x="0" y="0"/>
+          <a:ext cx="0" cy="0"/>
+          <a:chOff x="0" y="0"/>
+          <a:chExt cx="0" cy="0"/>
+        </a:xfrm>
+      </p:grpSpPr>
+      <p:sp>
+        <p:nvSpPr>
+          <p:cNvPr id="4" name="Marcador de número de diapositiva 3">
+            <a:extLst>
+              <a:ext uri="{FF2B5EF4-FFF2-40B4-BE49-F238E27FC236}">
+                <a16:creationId xmlns:a16="http://schemas.microsoft.com/office/drawing/2014/main" id="{2FAE126D-1447-0D60-7980-11B426DFB0A0}"/>
+              </a:ext>
+            </a:extLst>
+          </p:cNvPr>
+          <p:cNvSpPr>
+            <a:spLocks noGrp="1"/>
+          </p:cNvSpPr>
+          <p:nvPr>
+            <p:ph type="sldNum" sz="quarter" idx="12"/>
+          </p:nvPr>
+        </p:nvSpPr>
+        <p:spPr/>
+        <p:txBody>
+          <a:bodyPr/>
+          <a:lstStyle/>
+          <a:p>
+            <a:fld id="{B2DC25EE-239B-4C5F-AAD1-255A7D5F1EE2}" type="slidenum">
+              <a:rPr lang="en-US" smtClean="0"/>
+              <a:t>12</a:t>
+            </a:fld>
+            <a:endParaRPr lang="en-US" dirty="0"/>
+          </a:p>
+        </p:txBody>
+      </p:sp>
+      <p:sp>
+        <p:nvSpPr>
+          <p:cNvPr id="14" name="CuadroTexto 13">
+            <a:extLst>
+              <a:ext uri="{FF2B5EF4-FFF2-40B4-BE49-F238E27FC236}">
+                <a16:creationId xmlns:a16="http://schemas.microsoft.com/office/drawing/2014/main" id="{5F7AA830-F69E-547C-0D05-F26067E5119D}"/>
+              </a:ext>
+            </a:extLst>
+          </p:cNvPr>
+          <p:cNvSpPr txBox="1"/>
+          <p:nvPr/>
+        </p:nvSpPr>
+        <p:spPr>
+          <a:xfrm>
+            <a:off x="428603" y="2198728"/>
+            <a:ext cx="11266092" cy="646331"/>
+          </a:xfrm>
+          <a:prstGeom prst="rect">
+            <a:avLst/>
+          </a:prstGeom>
+          <a:noFill/>
+        </p:spPr>
+        <p:txBody>
+          <a:bodyPr wrap="square" rtlCol="0">
+            <a:spAutoFit/>
+          </a:bodyPr>
+          <a:lstStyle/>
+          <a:p>
+            <a:pPr algn="just"/>
+            <a:endParaRPr lang="ca-ES" dirty="0"/>
+          </a:p>
+          <a:p>
+            <a:pPr algn="just"/>
+            <a:endParaRPr lang="ca-ES" dirty="0"/>
+          </a:p>
+        </p:txBody>
+      </p:sp>
+      <p:pic>
+        <p:nvPicPr>
+          <p:cNvPr id="3" name="Imagen 2">
+            <a:extLst>
+              <a:ext uri="{FF2B5EF4-FFF2-40B4-BE49-F238E27FC236}">
+                <a16:creationId xmlns:a16="http://schemas.microsoft.com/office/drawing/2014/main" id="{85523671-5DCA-AB98-A629-674D0142975D}"/>
+              </a:ext>
+            </a:extLst>
+          </p:cNvPr>
+          <p:cNvPicPr>
+            <a:picLocks noChangeAspect="1"/>
+          </p:cNvPicPr>
+          <p:nvPr/>
+        </p:nvPicPr>
+        <p:blipFill>
+          <a:blip r:embed="rId2">
+            <a:extLst>
+              <a:ext uri="{28A0092B-C50C-407E-A947-70E740481C1C}">
+                <a14:useLocalDpi xmlns:a14="http://schemas.microsoft.com/office/drawing/2010/main" val="0"/>
+              </a:ext>
+            </a:extLst>
+          </a:blip>
+          <a:stretch>
+            <a:fillRect/>
+          </a:stretch>
+        </p:blipFill>
+        <p:spPr>
+          <a:xfrm>
+            <a:off x="1446383" y="725993"/>
+            <a:ext cx="9299234" cy="5406014"/>
+          </a:xfrm>
+          <a:prstGeom prst="rect">
+            <a:avLst/>
+          </a:prstGeom>
+        </p:spPr>
+      </p:pic>
+    </p:spTree>
+    <p:extLst>
+      <p:ext uri="{BB962C8B-B14F-4D97-AF65-F5344CB8AC3E}">
+        <p14:creationId xmlns:p14="http://schemas.microsoft.com/office/powerpoint/2010/main" val="3165161432"/>
+      </p:ext>
+    </p:extLst>
+  </p:cSld>
+  <p:clrMapOvr>
+    <a:masterClrMapping/>
+  </p:clrMapOvr>
+</p:sld>
+</file>
+
+<file path=ppt/slides/slide13.xml><?xml version="1.0" encoding="utf-8"?>
+<p:sld xmlns:a="http://schemas.openxmlformats.org/drawingml/2006/main" xmlns:r="http://schemas.openxmlformats.org/officeDocument/2006/relationships" xmlns:p="http://schemas.openxmlformats.org/presentationml/2006/main">
+  <p:cSld>
+    <p:spTree>
+      <p:nvGrpSpPr>
+        <p:cNvPr id="1" name="">
+          <a:extLst>
+            <a:ext uri="{FF2B5EF4-FFF2-40B4-BE49-F238E27FC236}">
+              <a16:creationId xmlns:a16="http://schemas.microsoft.com/office/drawing/2014/main" id="{917BC502-3E3F-1478-9F4E-A0447B6188DB}"/>
+            </a:ext>
+          </a:extLst>
+        </p:cNvPr>
+        <p:cNvGrpSpPr/>
+        <p:nvPr/>
+      </p:nvGrpSpPr>
+      <p:grpSpPr>
+        <a:xfrm>
+          <a:off x="0" y="0"/>
+          <a:ext cx="0" cy="0"/>
+          <a:chOff x="0" y="0"/>
+          <a:chExt cx="0" cy="0"/>
+        </a:xfrm>
+      </p:grpSpPr>
+      <p:sp>
+        <p:nvSpPr>
+          <p:cNvPr id="2" name="Título 1">
+            <a:extLst>
+              <a:ext uri="{FF2B5EF4-FFF2-40B4-BE49-F238E27FC236}">
+                <a16:creationId xmlns:a16="http://schemas.microsoft.com/office/drawing/2014/main" id="{958E12FB-7C9B-7CC8-1D44-8EE494966EA9}"/>
+              </a:ext>
+            </a:extLst>
+          </p:cNvPr>
+          <p:cNvSpPr>
+            <a:spLocks noGrp="1"/>
+          </p:cNvSpPr>
+          <p:nvPr>
+            <p:ph type="title"/>
+          </p:nvPr>
+        </p:nvSpPr>
+        <p:spPr/>
+        <p:txBody>
+          <a:bodyPr/>
+          <a:lstStyle/>
+          <a:p>
+            <a:r>
+              <a:rPr lang="ca-ES" dirty="0"/>
+              <a:t>Acceptar comandes a repartir</a:t>
+            </a:r>
+          </a:p>
+        </p:txBody>
+      </p:sp>
+      <p:sp>
+        <p:nvSpPr>
+          <p:cNvPr id="4" name="Marcador de número de diapositiva 3">
+            <a:extLst>
+              <a:ext uri="{FF2B5EF4-FFF2-40B4-BE49-F238E27FC236}">
+                <a16:creationId xmlns:a16="http://schemas.microsoft.com/office/drawing/2014/main" id="{910961B6-9507-206C-1593-D9ED0517AD71}"/>
+              </a:ext>
+            </a:extLst>
+          </p:cNvPr>
+          <p:cNvSpPr>
+            <a:spLocks noGrp="1"/>
+          </p:cNvSpPr>
+          <p:nvPr>
+            <p:ph type="sldNum" sz="quarter" idx="12"/>
+          </p:nvPr>
+        </p:nvSpPr>
+        <p:spPr/>
+        <p:txBody>
+          <a:bodyPr/>
+          <a:lstStyle/>
+          <a:p>
+            <a:fld id="{B2DC25EE-239B-4C5F-AAD1-255A7D5F1EE2}" type="slidenum">
+              <a:rPr lang="en-US" smtClean="0"/>
+              <a:t>13</a:t>
+            </a:fld>
+            <a:endParaRPr lang="en-US" dirty="0"/>
+          </a:p>
+        </p:txBody>
+      </p:sp>
+      <p:pic>
+        <p:nvPicPr>
+          <p:cNvPr id="5" name="Imagen 4">
+            <a:extLst>
+              <a:ext uri="{FF2B5EF4-FFF2-40B4-BE49-F238E27FC236}">
+                <a16:creationId xmlns:a16="http://schemas.microsoft.com/office/drawing/2014/main" id="{D187E8EB-C7FB-12B8-1655-25AC2567226A}"/>
+              </a:ext>
+            </a:extLst>
+          </p:cNvPr>
+          <p:cNvPicPr>
+            <a:picLocks noChangeAspect="1"/>
+          </p:cNvPicPr>
+          <p:nvPr/>
+        </p:nvPicPr>
+        <p:blipFill>
+          <a:blip r:embed="rId2"/>
+          <a:stretch>
+            <a:fillRect/>
+          </a:stretch>
+        </p:blipFill>
+        <p:spPr>
+          <a:xfrm>
+            <a:off x="3738233" y="2274949"/>
+            <a:ext cx="4715533" cy="4315427"/>
+          </a:xfrm>
+          <a:prstGeom prst="rect">
+            <a:avLst/>
+          </a:prstGeom>
+        </p:spPr>
+      </p:pic>
+    </p:spTree>
+    <p:extLst>
+      <p:ext uri="{BB962C8B-B14F-4D97-AF65-F5344CB8AC3E}">
+        <p14:creationId xmlns:p14="http://schemas.microsoft.com/office/powerpoint/2010/main" val="163075127"/>
+      </p:ext>
+    </p:extLst>
+  </p:cSld>
+  <p:clrMapOvr>
+    <a:masterClrMapping/>
+  </p:clrMapOvr>
+</p:sld>
+</file>
+
+<file path=ppt/slides/slide14.xml><?xml version="1.0" encoding="utf-8"?>
+<p:sld xmlns:a="http://schemas.openxmlformats.org/drawingml/2006/main" xmlns:r="http://schemas.openxmlformats.org/officeDocument/2006/relationships" xmlns:p="http://schemas.openxmlformats.org/presentationml/2006/main">
+  <p:cSld>
+    <p:spTree>
+      <p:nvGrpSpPr>
+        <p:cNvPr id="1" name="">
+          <a:extLst>
+            <a:ext uri="{FF2B5EF4-FFF2-40B4-BE49-F238E27FC236}">
+              <a16:creationId xmlns:a16="http://schemas.microsoft.com/office/drawing/2014/main" id="{7FEB293A-C806-D336-1AC9-35357AC79175}"/>
+            </a:ext>
+          </a:extLst>
+        </p:cNvPr>
+        <p:cNvGrpSpPr/>
+        <p:nvPr/>
+      </p:nvGrpSpPr>
+      <p:grpSpPr>
+        <a:xfrm>
+          <a:off x="0" y="0"/>
+          <a:ext cx="0" cy="0"/>
+          <a:chOff x="0" y="0"/>
+          <a:chExt cx="0" cy="0"/>
+        </a:xfrm>
+      </p:grpSpPr>
+      <p:sp>
+        <p:nvSpPr>
+          <p:cNvPr id="4" name="Marcador de número de diapositiva 3">
+            <a:extLst>
+              <a:ext uri="{FF2B5EF4-FFF2-40B4-BE49-F238E27FC236}">
+                <a16:creationId xmlns:a16="http://schemas.microsoft.com/office/drawing/2014/main" id="{23A2BC6E-E1AE-394E-0730-9A7CD30284D8}"/>
+              </a:ext>
+            </a:extLst>
+          </p:cNvPr>
+          <p:cNvSpPr>
+            <a:spLocks noGrp="1"/>
+          </p:cNvSpPr>
+          <p:nvPr>
+            <p:ph type="sldNum" sz="quarter" idx="12"/>
+          </p:nvPr>
+        </p:nvSpPr>
+        <p:spPr/>
+        <p:txBody>
+          <a:bodyPr/>
+          <a:lstStyle/>
+          <a:p>
+            <a:fld id="{B2DC25EE-239B-4C5F-AAD1-255A7D5F1EE2}" type="slidenum">
+              <a:rPr lang="en-US" smtClean="0"/>
+              <a:t>14</a:t>
+            </a:fld>
+            <a:endParaRPr lang="en-US" dirty="0"/>
+          </a:p>
+        </p:txBody>
+      </p:sp>
+      <p:sp>
+        <p:nvSpPr>
+          <p:cNvPr id="14" name="CuadroTexto 13">
+            <a:extLst>
+              <a:ext uri="{FF2B5EF4-FFF2-40B4-BE49-F238E27FC236}">
+                <a16:creationId xmlns:a16="http://schemas.microsoft.com/office/drawing/2014/main" id="{40BA75B5-A266-01A3-574C-CE8D41393DEF}"/>
+              </a:ext>
+            </a:extLst>
+          </p:cNvPr>
+          <p:cNvSpPr txBox="1"/>
+          <p:nvPr/>
+        </p:nvSpPr>
+        <p:spPr>
+          <a:xfrm>
+            <a:off x="428603" y="2198728"/>
+            <a:ext cx="11266092" cy="646331"/>
+          </a:xfrm>
+          <a:prstGeom prst="rect">
+            <a:avLst/>
+          </a:prstGeom>
+          <a:noFill/>
+        </p:spPr>
+        <p:txBody>
+          <a:bodyPr wrap="square" rtlCol="0">
+            <a:spAutoFit/>
+          </a:bodyPr>
+          <a:lstStyle/>
+          <a:p>
+            <a:pPr algn="just"/>
+            <a:endParaRPr lang="ca-ES" dirty="0"/>
+          </a:p>
+          <a:p>
+            <a:pPr algn="just"/>
+            <a:endParaRPr lang="ca-ES" dirty="0"/>
+          </a:p>
+        </p:txBody>
+      </p:sp>
+      <p:pic>
+        <p:nvPicPr>
+          <p:cNvPr id="5" name="Imagen 4">
+            <a:extLst>
+              <a:ext uri="{FF2B5EF4-FFF2-40B4-BE49-F238E27FC236}">
+                <a16:creationId xmlns:a16="http://schemas.microsoft.com/office/drawing/2014/main" id="{F45A0F68-D9A0-0547-9527-AB1CDB7D00AE}"/>
+              </a:ext>
+            </a:extLst>
+          </p:cNvPr>
+          <p:cNvPicPr>
+            <a:picLocks noChangeAspect="1"/>
+          </p:cNvPicPr>
+          <p:nvPr/>
+        </p:nvPicPr>
+        <p:blipFill>
+          <a:blip r:embed="rId2">
+            <a:extLst>
+              <a:ext uri="{28A0092B-C50C-407E-A947-70E740481C1C}">
+                <a14:useLocalDpi xmlns:a14="http://schemas.microsoft.com/office/drawing/2010/main" val="0"/>
+              </a:ext>
+            </a:extLst>
+          </a:blip>
+          <a:stretch>
+            <a:fillRect/>
+          </a:stretch>
+        </p:blipFill>
+        <p:spPr>
+          <a:xfrm>
+            <a:off x="0" y="1342965"/>
+            <a:ext cx="12192000" cy="4172070"/>
+          </a:xfrm>
+          <a:prstGeom prst="rect">
+            <a:avLst/>
+          </a:prstGeom>
+        </p:spPr>
+      </p:pic>
+    </p:spTree>
+    <p:extLst>
+      <p:ext uri="{BB962C8B-B14F-4D97-AF65-F5344CB8AC3E}">
+        <p14:creationId xmlns:p14="http://schemas.microsoft.com/office/powerpoint/2010/main" val="646553207"/>
+      </p:ext>
+    </p:extLst>
+  </p:cSld>
+  <p:clrMapOvr>
+    <a:masterClrMapping/>
+  </p:clrMapOvr>
+</p:sld>
+</file>
+
+<file path=ppt/slides/slide2.xml><?xml version="1.0" encoding="utf-8"?>
+<p:sld xmlns:a="http://schemas.openxmlformats.org/drawingml/2006/main" xmlns:r="http://schemas.openxmlformats.org/officeDocument/2006/relationships" xmlns:p="http://schemas.openxmlformats.org/presentationml/2006/main">
+  <p:cSld>
+    <p:spTree>
+      <p:nvGrpSpPr>
+        <p:cNvPr id="1" name="">
+          <a:extLst>
+            <a:ext uri="{FF2B5EF4-FFF2-40B4-BE49-F238E27FC236}">
+              <a16:creationId xmlns:a16="http://schemas.microsoft.com/office/drawing/2014/main" id="{36989573-EFED-57BE-F89C-AE8300493772}"/>
+            </a:ext>
+          </a:extLst>
+        </p:cNvPr>
+        <p:cNvGrpSpPr/>
+        <p:nvPr/>
+      </p:nvGrpSpPr>
+      <p:grpSpPr>
+        <a:xfrm>
+          <a:off x="0" y="0"/>
+          <a:ext cx="0" cy="0"/>
+          <a:chOff x="0" y="0"/>
+          <a:chExt cx="0" cy="0"/>
+        </a:xfrm>
+      </p:grpSpPr>
+      <p:sp>
+        <p:nvSpPr>
+          <p:cNvPr id="4" name="Marcador de número de diapositiva 3">
+            <a:extLst>
+              <a:ext uri="{FF2B5EF4-FFF2-40B4-BE49-F238E27FC236}">
+                <a16:creationId xmlns:a16="http://schemas.microsoft.com/office/drawing/2014/main" id="{96148110-E30E-3D01-8DD3-C818C66A630A}"/>
+              </a:ext>
+            </a:extLst>
+          </p:cNvPr>
+          <p:cNvSpPr>
+            <a:spLocks noGrp="1"/>
+          </p:cNvSpPr>
+          <p:nvPr>
+            <p:ph type="sldNum" sz="quarter" idx="12"/>
+          </p:nvPr>
+        </p:nvSpPr>
+        <p:spPr/>
+        <p:txBody>
+          <a:bodyPr/>
+          <a:lstStyle/>
+          <a:p>
+            <a:fld id="{B2DC25EE-239B-4C5F-AAD1-255A7D5F1EE2}" type="slidenum">
+              <a:rPr lang="en-US" smtClean="0"/>
+              <a:t>2</a:t>
+            </a:fld>
+            <a:endParaRPr lang="en-US" dirty="0"/>
+          </a:p>
+        </p:txBody>
+      </p:sp>
+      <p:sp>
+        <p:nvSpPr>
+          <p:cNvPr id="14" name="CuadroTexto 13">
+            <a:extLst>
+              <a:ext uri="{FF2B5EF4-FFF2-40B4-BE49-F238E27FC236}">
+                <a16:creationId xmlns:a16="http://schemas.microsoft.com/office/drawing/2014/main" id="{9DB182DC-B39B-F545-AD64-72840270D726}"/>
+              </a:ext>
+            </a:extLst>
+          </p:cNvPr>
+          <p:cNvSpPr txBox="1"/>
+          <p:nvPr/>
+        </p:nvSpPr>
+        <p:spPr>
+          <a:xfrm>
+            <a:off x="428603" y="2198728"/>
+            <a:ext cx="11266092" cy="646331"/>
+          </a:xfrm>
+          <a:prstGeom prst="rect">
+            <a:avLst/>
+          </a:prstGeom>
+          <a:noFill/>
+        </p:spPr>
+        <p:txBody>
+          <a:bodyPr wrap="square" rtlCol="0">
+            <a:spAutoFit/>
+          </a:bodyPr>
+          <a:lstStyle/>
+          <a:p>
+            <a:pPr algn="just"/>
+            <a:endParaRPr lang="ca-ES" dirty="0"/>
+          </a:p>
+          <a:p>
+            <a:pPr algn="just"/>
+            <a:endParaRPr lang="ca-ES" dirty="0"/>
+          </a:p>
+        </p:txBody>
+      </p:sp>
+      <p:pic>
+        <p:nvPicPr>
+          <p:cNvPr id="3" name="Imagen 2">
+            <a:extLst>
+              <a:ext uri="{FF2B5EF4-FFF2-40B4-BE49-F238E27FC236}">
+                <a16:creationId xmlns:a16="http://schemas.microsoft.com/office/drawing/2014/main" id="{0C4D667D-6529-BBCB-C2CA-6E7C0847B9BE}"/>
+              </a:ext>
+            </a:extLst>
+          </p:cNvPr>
+          <p:cNvPicPr>
+            <a:picLocks noChangeAspect="1"/>
+          </p:cNvPicPr>
+          <p:nvPr/>
+        </p:nvPicPr>
+        <p:blipFill>
+          <a:blip r:embed="rId2">
+            <a:extLst>
+              <a:ext uri="{28A0092B-C50C-407E-A947-70E740481C1C}">
+                <a14:useLocalDpi xmlns:a14="http://schemas.microsoft.com/office/drawing/2010/main" val="0"/>
+              </a:ext>
+            </a:extLst>
+          </a:blip>
+          <a:stretch>
+            <a:fillRect/>
+          </a:stretch>
+        </p:blipFill>
+        <p:spPr>
+          <a:xfrm>
+            <a:off x="1423987" y="395287"/>
+            <a:ext cx="9344025" cy="6067425"/>
+          </a:xfrm>
+          <a:prstGeom prst="rect">
+            <a:avLst/>
+          </a:prstGeom>
+        </p:spPr>
+      </p:pic>
+    </p:spTree>
+    <p:extLst>
+      <p:ext uri="{BB962C8B-B14F-4D97-AF65-F5344CB8AC3E}">
+        <p14:creationId xmlns:p14="http://schemas.microsoft.com/office/powerpoint/2010/main" val="996049454"/>
+      </p:ext>
+    </p:extLst>
+  </p:cSld>
+  <p:clrMapOvr>
+    <a:masterClrMapping/>
+  </p:clrMapOvr>
+</p:sld>
+</file>
+
+<file path=ppt/slides/slide3.xml><?xml version="1.0" encoding="utf-8"?>
+<p:sld xmlns:a="http://schemas.openxmlformats.org/drawingml/2006/main" xmlns:r="http://schemas.openxmlformats.org/officeDocument/2006/relationships" xmlns:p="http://schemas.openxmlformats.org/presentationml/2006/main">
+  <p:cSld>
+    <p:spTree>
+      <p:nvGrpSpPr>
+        <p:cNvPr id="1" name="">
+          <a:extLst>
+            <a:ext uri="{FF2B5EF4-FFF2-40B4-BE49-F238E27FC236}">
+              <a16:creationId xmlns:a16="http://schemas.microsoft.com/office/drawing/2014/main" id="{6B4B2E17-791B-9C93-B7D9-46F4439A3C2B}"/>
+            </a:ext>
+          </a:extLst>
+        </p:cNvPr>
+        <p:cNvGrpSpPr/>
+        <p:nvPr/>
+      </p:nvGrpSpPr>
+      <p:grpSpPr>
+        <a:xfrm>
+          <a:off x="0" y="0"/>
+          <a:ext cx="0" cy="0"/>
+          <a:chOff x="0" y="0"/>
+          <a:chExt cx="0" cy="0"/>
+        </a:xfrm>
+      </p:grpSpPr>
+      <p:sp>
+        <p:nvSpPr>
+          <p:cNvPr id="2" name="Título 1">
+            <a:extLst>
+              <a:ext uri="{FF2B5EF4-FFF2-40B4-BE49-F238E27FC236}">
+                <a16:creationId xmlns:a16="http://schemas.microsoft.com/office/drawing/2014/main" id="{E95BE9E7-D09F-27E3-721D-90D31399F73C}"/>
+              </a:ext>
+            </a:extLst>
+          </p:cNvPr>
+          <p:cNvSpPr>
+            <a:spLocks noGrp="1"/>
+          </p:cNvSpPr>
+          <p:nvPr>
+            <p:ph type="title"/>
+          </p:nvPr>
+        </p:nvSpPr>
+        <p:spPr/>
+        <p:txBody>
+          <a:bodyPr/>
+          <a:lstStyle/>
+          <a:p>
+            <a:r>
+              <a:rPr lang="ca-ES" dirty="0"/>
+              <a:t>Fer comandes</a:t>
+            </a:r>
+          </a:p>
+        </p:txBody>
+      </p:sp>
+      <p:sp>
+        <p:nvSpPr>
+          <p:cNvPr id="4" name="Marcador de número de diapositiva 3">
+            <a:extLst>
+              <a:ext uri="{FF2B5EF4-FFF2-40B4-BE49-F238E27FC236}">
+                <a16:creationId xmlns:a16="http://schemas.microsoft.com/office/drawing/2014/main" id="{7065462A-F4CA-BDDF-5CA8-BFDC36D6719C}"/>
+              </a:ext>
+            </a:extLst>
+          </p:cNvPr>
+          <p:cNvSpPr>
+            <a:spLocks noGrp="1"/>
+          </p:cNvSpPr>
+          <p:nvPr>
+            <p:ph type="sldNum" sz="quarter" idx="12"/>
+          </p:nvPr>
+        </p:nvSpPr>
+        <p:spPr/>
+        <p:txBody>
+          <a:bodyPr/>
+          <a:lstStyle/>
+          <a:p>
+            <a:fld id="{B2DC25EE-239B-4C5F-AAD1-255A7D5F1EE2}" type="slidenum">
+              <a:rPr lang="en-US" smtClean="0"/>
+              <a:t>3</a:t>
+            </a:fld>
+            <a:endParaRPr lang="en-US" dirty="0"/>
+          </a:p>
+        </p:txBody>
+      </p:sp>
+      <p:pic>
+        <p:nvPicPr>
+          <p:cNvPr id="5" name="Imagen 4">
+            <a:extLst>
+              <a:ext uri="{FF2B5EF4-FFF2-40B4-BE49-F238E27FC236}">
+                <a16:creationId xmlns:a16="http://schemas.microsoft.com/office/drawing/2014/main" id="{557CEFE5-51C3-F6EE-74D4-56511FCB0395}"/>
+              </a:ext>
+            </a:extLst>
+          </p:cNvPr>
+          <p:cNvPicPr>
+            <a:picLocks noChangeAspect="1"/>
+          </p:cNvPicPr>
+          <p:nvPr/>
+        </p:nvPicPr>
+        <p:blipFill>
+          <a:blip r:embed="rId2"/>
+          <a:stretch>
+            <a:fillRect/>
+          </a:stretch>
+        </p:blipFill>
+        <p:spPr>
+          <a:xfrm>
+            <a:off x="3906148" y="2008155"/>
+            <a:ext cx="4207705" cy="4849845"/>
+          </a:xfrm>
+          <a:prstGeom prst="rect">
+            <a:avLst/>
+          </a:prstGeom>
+        </p:spPr>
+      </p:pic>
+    </p:spTree>
+    <p:extLst>
+      <p:ext uri="{BB962C8B-B14F-4D97-AF65-F5344CB8AC3E}">
+        <p14:creationId xmlns:p14="http://schemas.microsoft.com/office/powerpoint/2010/main" val="720226807"/>
+      </p:ext>
+    </p:extLst>
+  </p:cSld>
+  <p:clrMapOvr>
+    <a:masterClrMapping/>
+  </p:clrMapOvr>
+</p:sld>
+</file>
+
+<file path=ppt/slides/slide4.xml><?xml version="1.0" encoding="utf-8"?>
+<p:sld xmlns:a="http://schemas.openxmlformats.org/drawingml/2006/main" xmlns:r="http://schemas.openxmlformats.org/officeDocument/2006/relationships" xmlns:p="http://schemas.openxmlformats.org/presentationml/2006/main">
+  <p:cSld>
+    <p:spTree>
+      <p:nvGrpSpPr>
+        <p:cNvPr id="1" name="">
+          <a:extLst>
+            <a:ext uri="{FF2B5EF4-FFF2-40B4-BE49-F238E27FC236}">
+              <a16:creationId xmlns:a16="http://schemas.microsoft.com/office/drawing/2014/main" id="{6FB3CCF0-3304-B202-3BDE-65A05A0C11F0}"/>
+            </a:ext>
+          </a:extLst>
+        </p:cNvPr>
+        <p:cNvGrpSpPr/>
+        <p:nvPr/>
+      </p:nvGrpSpPr>
+      <p:grpSpPr>
+        <a:xfrm>
+          <a:off x="0" y="0"/>
+          <a:ext cx="0" cy="0"/>
+          <a:chOff x="0" y="0"/>
+          <a:chExt cx="0" cy="0"/>
+        </a:xfrm>
+      </p:grpSpPr>
+      <p:sp>
+        <p:nvSpPr>
+          <p:cNvPr id="4" name="Marcador de número de diapositiva 3">
+            <a:extLst>
+              <a:ext uri="{FF2B5EF4-FFF2-40B4-BE49-F238E27FC236}">
+                <a16:creationId xmlns:a16="http://schemas.microsoft.com/office/drawing/2014/main" id="{5EBD482D-DB08-6118-D4B5-A51A2EADA6F8}"/>
+              </a:ext>
+            </a:extLst>
+          </p:cNvPr>
+          <p:cNvSpPr>
+            <a:spLocks noGrp="1"/>
+          </p:cNvSpPr>
+          <p:nvPr>
+            <p:ph type="sldNum" sz="quarter" idx="12"/>
+          </p:nvPr>
+        </p:nvSpPr>
+        <p:spPr/>
+        <p:txBody>
+          <a:bodyPr/>
+          <a:lstStyle/>
+          <a:p>
+            <a:fld id="{B2DC25EE-239B-4C5F-AAD1-255A7D5F1EE2}" type="slidenum">
+              <a:rPr lang="en-US" smtClean="0"/>
+              <a:t>4</a:t>
+            </a:fld>
+            <a:endParaRPr lang="en-US" dirty="0"/>
+          </a:p>
+        </p:txBody>
+      </p:sp>
+      <p:sp>
+        <p:nvSpPr>
+          <p:cNvPr id="14" name="CuadroTexto 13">
+            <a:extLst>
+              <a:ext uri="{FF2B5EF4-FFF2-40B4-BE49-F238E27FC236}">
+                <a16:creationId xmlns:a16="http://schemas.microsoft.com/office/drawing/2014/main" id="{A726846D-7829-9063-BDD1-04CA2DACE228}"/>
+              </a:ext>
+            </a:extLst>
+          </p:cNvPr>
+          <p:cNvSpPr txBox="1"/>
+          <p:nvPr/>
+        </p:nvSpPr>
+        <p:spPr>
+          <a:xfrm>
+            <a:off x="428603" y="2198728"/>
+            <a:ext cx="11266092" cy="646331"/>
+          </a:xfrm>
+          <a:prstGeom prst="rect">
+            <a:avLst/>
+          </a:prstGeom>
+          <a:noFill/>
+        </p:spPr>
+        <p:txBody>
+          <a:bodyPr wrap="square" rtlCol="0">
+            <a:spAutoFit/>
+          </a:bodyPr>
+          <a:lstStyle/>
+          <a:p>
+            <a:pPr algn="just"/>
+            <a:endParaRPr lang="ca-ES" dirty="0"/>
+          </a:p>
+          <a:p>
+            <a:pPr algn="just"/>
+            <a:endParaRPr lang="ca-ES" dirty="0"/>
+          </a:p>
+        </p:txBody>
+      </p:sp>
+      <p:pic>
+        <p:nvPicPr>
+          <p:cNvPr id="3" name="Imagen 2">
+            <a:extLst>
+              <a:ext uri="{FF2B5EF4-FFF2-40B4-BE49-F238E27FC236}">
+                <a16:creationId xmlns:a16="http://schemas.microsoft.com/office/drawing/2014/main" id="{D26B1A8C-2479-2DB9-9DD8-73D905AB0AD9}"/>
+              </a:ext>
+            </a:extLst>
+          </p:cNvPr>
+          <p:cNvPicPr>
+            <a:picLocks noChangeAspect="1"/>
+          </p:cNvPicPr>
+          <p:nvPr/>
+        </p:nvPicPr>
+        <p:blipFill>
+          <a:blip r:embed="rId2">
+            <a:extLst>
+              <a:ext uri="{28A0092B-C50C-407E-A947-70E740481C1C}">
+                <a14:useLocalDpi xmlns:a14="http://schemas.microsoft.com/office/drawing/2010/main" val="0"/>
+              </a:ext>
+            </a:extLst>
+          </a:blip>
+          <a:stretch>
+            <a:fillRect/>
+          </a:stretch>
+        </p:blipFill>
+        <p:spPr>
+          <a:xfrm>
+            <a:off x="581025" y="223837"/>
+            <a:ext cx="11029950" cy="6410325"/>
+          </a:xfrm>
+          <a:prstGeom prst="rect">
+            <a:avLst/>
+          </a:prstGeom>
+        </p:spPr>
+      </p:pic>
+    </p:spTree>
+    <p:extLst>
+      <p:ext uri="{BB962C8B-B14F-4D97-AF65-F5344CB8AC3E}">
+        <p14:creationId xmlns:p14="http://schemas.microsoft.com/office/powerpoint/2010/main" val="2949212560"/>
+      </p:ext>
+    </p:extLst>
+  </p:cSld>
+  <p:clrMapOvr>
+    <a:masterClrMapping/>
+  </p:clrMapOvr>
+</p:sld>
+</file>
+
+<file path=ppt/slides/slide5.xml><?xml version="1.0" encoding="utf-8"?>
+<p:sld xmlns:a="http://schemas.openxmlformats.org/drawingml/2006/main" xmlns:r="http://schemas.openxmlformats.org/officeDocument/2006/relationships" xmlns:p="http://schemas.openxmlformats.org/presentationml/2006/main">
+  <p:cSld>
+    <p:spTree>
+      <p:nvGrpSpPr>
+        <p:cNvPr id="1" name="">
+          <a:extLst>
+            <a:ext uri="{FF2B5EF4-FFF2-40B4-BE49-F238E27FC236}">
+              <a16:creationId xmlns:a16="http://schemas.microsoft.com/office/drawing/2014/main" id="{ED84160F-D158-5DC9-0F5D-560F9184100A}"/>
+            </a:ext>
+          </a:extLst>
+        </p:cNvPr>
+        <p:cNvGrpSpPr/>
+        <p:nvPr/>
+      </p:nvGrpSpPr>
+      <p:grpSpPr>
+        <a:xfrm>
+          <a:off x="0" y="0"/>
+          <a:ext cx="0" cy="0"/>
+          <a:chOff x="0" y="0"/>
+          <a:chExt cx="0" cy="0"/>
+        </a:xfrm>
+      </p:grpSpPr>
+      <p:sp>
+        <p:nvSpPr>
+          <p:cNvPr id="2" name="Título 1">
+            <a:extLst>
+              <a:ext uri="{FF2B5EF4-FFF2-40B4-BE49-F238E27FC236}">
+                <a16:creationId xmlns:a16="http://schemas.microsoft.com/office/drawing/2014/main" id="{4F2964DB-5A90-BEEC-4CA2-5181B9405AE0}"/>
+              </a:ext>
+            </a:extLst>
+          </p:cNvPr>
+          <p:cNvSpPr>
+            <a:spLocks noGrp="1"/>
+          </p:cNvSpPr>
+          <p:nvPr>
+            <p:ph type="title"/>
+          </p:nvPr>
+        </p:nvSpPr>
+        <p:spPr/>
+        <p:txBody>
+          <a:bodyPr/>
+          <a:lstStyle/>
+          <a:p>
+            <a:r>
+              <a:rPr lang="ca-ES" dirty="0"/>
+              <a:t>Modificar ingredients addicionals</a:t>
+            </a:r>
+          </a:p>
+        </p:txBody>
+      </p:sp>
+      <p:sp>
+        <p:nvSpPr>
+          <p:cNvPr id="4" name="Marcador de número de diapositiva 3">
+            <a:extLst>
+              <a:ext uri="{FF2B5EF4-FFF2-40B4-BE49-F238E27FC236}">
+                <a16:creationId xmlns:a16="http://schemas.microsoft.com/office/drawing/2014/main" id="{4D1BBE72-D159-6268-FF37-F17E260CAEB5}"/>
+              </a:ext>
+            </a:extLst>
+          </p:cNvPr>
+          <p:cNvSpPr>
+            <a:spLocks noGrp="1"/>
+          </p:cNvSpPr>
+          <p:nvPr>
+            <p:ph type="sldNum" sz="quarter" idx="12"/>
+          </p:nvPr>
+        </p:nvSpPr>
+        <p:spPr/>
+        <p:txBody>
+          <a:bodyPr/>
+          <a:lstStyle/>
+          <a:p>
+            <a:fld id="{B2DC25EE-239B-4C5F-AAD1-255A7D5F1EE2}" type="slidenum">
+              <a:rPr lang="en-US" smtClean="0"/>
+              <a:t>5</a:t>
+            </a:fld>
+            <a:endParaRPr lang="en-US" dirty="0"/>
+          </a:p>
+        </p:txBody>
+      </p:sp>
+      <p:pic>
+        <p:nvPicPr>
+          <p:cNvPr id="6" name="Imagen 5">
+            <a:extLst>
+              <a:ext uri="{FF2B5EF4-FFF2-40B4-BE49-F238E27FC236}">
+                <a16:creationId xmlns:a16="http://schemas.microsoft.com/office/drawing/2014/main" id="{36301A94-89A8-23A7-7967-1E63DFD3B0F7}"/>
+              </a:ext>
+            </a:extLst>
+          </p:cNvPr>
+          <p:cNvPicPr>
+            <a:picLocks noChangeAspect="1"/>
+          </p:cNvPicPr>
+          <p:nvPr/>
+        </p:nvPicPr>
+        <p:blipFill>
+          <a:blip r:embed="rId2"/>
+          <a:stretch>
+            <a:fillRect/>
+          </a:stretch>
+        </p:blipFill>
+        <p:spPr>
+          <a:xfrm>
+            <a:off x="3694356" y="2148837"/>
+            <a:ext cx="4734586" cy="4572638"/>
+          </a:xfrm>
+          <a:prstGeom prst="rect">
+            <a:avLst/>
+          </a:prstGeom>
+        </p:spPr>
+      </p:pic>
+    </p:spTree>
+    <p:extLst>
+      <p:ext uri="{BB962C8B-B14F-4D97-AF65-F5344CB8AC3E}">
+        <p14:creationId xmlns:p14="http://schemas.microsoft.com/office/powerpoint/2010/main" val="2514987296"/>
+      </p:ext>
+    </p:extLst>
+  </p:cSld>
+  <p:clrMapOvr>
+    <a:masterClrMapping/>
+  </p:clrMapOvr>
+</p:sld>
+</file>
+
+<file path=ppt/slides/slide6.xml><?xml version="1.0" encoding="utf-8"?>
+<p:sld xmlns:a="http://schemas.openxmlformats.org/drawingml/2006/main" xmlns:r="http://schemas.openxmlformats.org/officeDocument/2006/relationships" xmlns:p="http://schemas.openxmlformats.org/presentationml/2006/main">
+  <p:cSld>
+    <p:spTree>
+      <p:nvGrpSpPr>
+        <p:cNvPr id="1" name="">
+          <a:extLst>
+            <a:ext uri="{FF2B5EF4-FFF2-40B4-BE49-F238E27FC236}">
+              <a16:creationId xmlns:a16="http://schemas.microsoft.com/office/drawing/2014/main" id="{2B12653F-27BB-D47E-9728-92A6A69E3361}"/>
+            </a:ext>
+          </a:extLst>
+        </p:cNvPr>
+        <p:cNvGrpSpPr/>
+        <p:nvPr/>
+      </p:nvGrpSpPr>
+      <p:grpSpPr>
+        <a:xfrm>
+          <a:off x="0" y="0"/>
+          <a:ext cx="0" cy="0"/>
+          <a:chOff x="0" y="0"/>
+          <a:chExt cx="0" cy="0"/>
+        </a:xfrm>
+      </p:grpSpPr>
+      <p:sp>
+        <p:nvSpPr>
+          <p:cNvPr id="4" name="Marcador de número de diapositiva 3">
+            <a:extLst>
+              <a:ext uri="{FF2B5EF4-FFF2-40B4-BE49-F238E27FC236}">
+                <a16:creationId xmlns:a16="http://schemas.microsoft.com/office/drawing/2014/main" id="{217964F3-1F4C-EB58-646A-EC18EFF6D309}"/>
+              </a:ext>
+            </a:extLst>
+          </p:cNvPr>
+          <p:cNvSpPr>
+            <a:spLocks noGrp="1"/>
+          </p:cNvSpPr>
+          <p:nvPr>
+            <p:ph type="sldNum" sz="quarter" idx="12"/>
+          </p:nvPr>
+        </p:nvSpPr>
+        <p:spPr/>
+        <p:txBody>
+          <a:bodyPr/>
+          <a:lstStyle/>
+          <a:p>
+            <a:fld id="{B2DC25EE-239B-4C5F-AAD1-255A7D5F1EE2}" type="slidenum">
+              <a:rPr lang="en-US" smtClean="0"/>
+              <a:t>6</a:t>
+            </a:fld>
+            <a:endParaRPr lang="en-US" dirty="0"/>
+          </a:p>
+        </p:txBody>
+      </p:sp>
+      <p:sp>
+        <p:nvSpPr>
+          <p:cNvPr id="14" name="CuadroTexto 13">
+            <a:extLst>
+              <a:ext uri="{FF2B5EF4-FFF2-40B4-BE49-F238E27FC236}">
+                <a16:creationId xmlns:a16="http://schemas.microsoft.com/office/drawing/2014/main" id="{E73EB9B1-4806-417C-97D3-F28C17038ACD}"/>
+              </a:ext>
+            </a:extLst>
+          </p:cNvPr>
+          <p:cNvSpPr txBox="1"/>
+          <p:nvPr/>
+        </p:nvSpPr>
+        <p:spPr>
+          <a:xfrm>
+            <a:off x="428603" y="2198728"/>
+            <a:ext cx="11266092" cy="646331"/>
+          </a:xfrm>
+          <a:prstGeom prst="rect">
+            <a:avLst/>
+          </a:prstGeom>
+          <a:noFill/>
+        </p:spPr>
+        <p:txBody>
+          <a:bodyPr wrap="square" rtlCol="0">
+            <a:spAutoFit/>
+          </a:bodyPr>
+          <a:lstStyle/>
+          <a:p>
+            <a:pPr algn="just"/>
+            <a:endParaRPr lang="ca-ES" dirty="0"/>
+          </a:p>
+          <a:p>
+            <a:pPr algn="just"/>
+            <a:endParaRPr lang="ca-ES" dirty="0"/>
+          </a:p>
+        </p:txBody>
+      </p:sp>
+      <p:pic>
+        <p:nvPicPr>
+          <p:cNvPr id="3" name="Imagen 2">
+            <a:extLst>
+              <a:ext uri="{FF2B5EF4-FFF2-40B4-BE49-F238E27FC236}">
+                <a16:creationId xmlns:a16="http://schemas.microsoft.com/office/drawing/2014/main" id="{E7D98387-8AA4-15E6-E936-871AB93C2F3D}"/>
+              </a:ext>
+            </a:extLst>
+          </p:cNvPr>
+          <p:cNvPicPr>
+            <a:picLocks noChangeAspect="1"/>
+          </p:cNvPicPr>
+          <p:nvPr/>
+        </p:nvPicPr>
+        <p:blipFill>
+          <a:blip r:embed="rId2">
+            <a:extLst>
+              <a:ext uri="{28A0092B-C50C-407E-A947-70E740481C1C}">
+                <a14:useLocalDpi xmlns:a14="http://schemas.microsoft.com/office/drawing/2010/main" val="0"/>
+              </a:ext>
+            </a:extLst>
+          </a:blip>
+          <a:stretch>
+            <a:fillRect/>
+          </a:stretch>
+        </p:blipFill>
+        <p:spPr>
+          <a:xfrm>
+            <a:off x="161925" y="38100"/>
+            <a:ext cx="11868150" cy="6781800"/>
+          </a:xfrm>
+          <a:prstGeom prst="rect">
+            <a:avLst/>
+          </a:prstGeom>
+        </p:spPr>
+      </p:pic>
+    </p:spTree>
+    <p:extLst>
+      <p:ext uri="{BB962C8B-B14F-4D97-AF65-F5344CB8AC3E}">
+        <p14:creationId xmlns:p14="http://schemas.microsoft.com/office/powerpoint/2010/main" val="1897978279"/>
+      </p:ext>
+    </p:extLst>
+  </p:cSld>
+  <p:clrMapOvr>
+    <a:masterClrMapping/>
+  </p:clrMapOvr>
+</p:sld>
+</file>
+
+<file path=ppt/slides/slide7.xml><?xml version="1.0" encoding="utf-8"?>
+<p:sld xmlns:a="http://schemas.openxmlformats.org/drawingml/2006/main" xmlns:r="http://schemas.openxmlformats.org/officeDocument/2006/relationships" xmlns:p="http://schemas.openxmlformats.org/presentationml/2006/main">
+  <p:cSld>
+    <p:spTree>
+      <p:nvGrpSpPr>
+        <p:cNvPr id="1" name="">
+          <a:extLst>
+            <a:ext uri="{FF2B5EF4-FFF2-40B4-BE49-F238E27FC236}">
+              <a16:creationId xmlns:a16="http://schemas.microsoft.com/office/drawing/2014/main" id="{776584A6-78D0-ED60-88B0-B6224168F1EE}"/>
+            </a:ext>
+          </a:extLst>
+        </p:cNvPr>
+        <p:cNvGrpSpPr/>
+        <p:nvPr/>
+      </p:nvGrpSpPr>
+      <p:grpSpPr>
+        <a:xfrm>
+          <a:off x="0" y="0"/>
+          <a:ext cx="0" cy="0"/>
+          <a:chOff x="0" y="0"/>
+          <a:chExt cx="0" cy="0"/>
+        </a:xfrm>
+      </p:grpSpPr>
+      <p:sp>
+        <p:nvSpPr>
+          <p:cNvPr id="2" name="Título 1">
+            <a:extLst>
+              <a:ext uri="{FF2B5EF4-FFF2-40B4-BE49-F238E27FC236}">
+                <a16:creationId xmlns:a16="http://schemas.microsoft.com/office/drawing/2014/main" id="{DAECD3C9-7F71-7FBD-321B-A16CDC5F99E0}"/>
+              </a:ext>
+            </a:extLst>
+          </p:cNvPr>
+          <p:cNvSpPr>
+            <a:spLocks noGrp="1"/>
+          </p:cNvSpPr>
+          <p:nvPr>
+            <p:ph type="title"/>
+          </p:nvPr>
+        </p:nvSpPr>
+        <p:spPr/>
+        <p:txBody>
+          <a:bodyPr/>
+          <a:lstStyle/>
+          <a:p>
+            <a:r>
+              <a:rPr lang="ca-ES" dirty="0"/>
+              <a:t>Escollir qui reparteix</a:t>
+            </a:r>
+          </a:p>
+        </p:txBody>
+      </p:sp>
+      <p:sp>
+        <p:nvSpPr>
+          <p:cNvPr id="4" name="Marcador de número de diapositiva 3">
+            <a:extLst>
+              <a:ext uri="{FF2B5EF4-FFF2-40B4-BE49-F238E27FC236}">
+                <a16:creationId xmlns:a16="http://schemas.microsoft.com/office/drawing/2014/main" id="{77617FEE-3784-8494-C3AB-FD9A790550DF}"/>
+              </a:ext>
+            </a:extLst>
+          </p:cNvPr>
+          <p:cNvSpPr>
+            <a:spLocks noGrp="1"/>
+          </p:cNvSpPr>
+          <p:nvPr>
+            <p:ph type="sldNum" sz="quarter" idx="12"/>
+          </p:nvPr>
+        </p:nvSpPr>
+        <p:spPr/>
+        <p:txBody>
+          <a:bodyPr/>
+          <a:lstStyle/>
+          <a:p>
+            <a:fld id="{B2DC25EE-239B-4C5F-AAD1-255A7D5F1EE2}" type="slidenum">
+              <a:rPr lang="en-US" smtClean="0"/>
+              <a:t>7</a:t>
+            </a:fld>
+            <a:endParaRPr lang="en-US" dirty="0"/>
+          </a:p>
+        </p:txBody>
+      </p:sp>
+      <p:pic>
+        <p:nvPicPr>
+          <p:cNvPr id="6" name="Imagen 5">
+            <a:extLst>
+              <a:ext uri="{FF2B5EF4-FFF2-40B4-BE49-F238E27FC236}">
+                <a16:creationId xmlns:a16="http://schemas.microsoft.com/office/drawing/2014/main" id="{D44B66B2-79B4-FD8D-1C0A-E52590D2908F}"/>
+              </a:ext>
+            </a:extLst>
+          </p:cNvPr>
+          <p:cNvPicPr>
+            <a:picLocks noChangeAspect="1"/>
+          </p:cNvPicPr>
+          <p:nvPr/>
+        </p:nvPicPr>
+        <p:blipFill>
+          <a:blip r:embed="rId2"/>
+          <a:stretch>
+            <a:fillRect/>
+          </a:stretch>
+        </p:blipFill>
+        <p:spPr>
+          <a:xfrm>
+            <a:off x="3794431" y="1994822"/>
+            <a:ext cx="4130370" cy="4863178"/>
+          </a:xfrm>
+          <a:prstGeom prst="rect">
+            <a:avLst/>
+          </a:prstGeom>
+        </p:spPr>
+      </p:pic>
+    </p:spTree>
+    <p:extLst>
+      <p:ext uri="{BB962C8B-B14F-4D97-AF65-F5344CB8AC3E}">
+        <p14:creationId xmlns:p14="http://schemas.microsoft.com/office/powerpoint/2010/main" val="1203508239"/>
+      </p:ext>
+    </p:extLst>
+  </p:cSld>
+  <p:clrMapOvr>
+    <a:masterClrMapping/>
+  </p:clrMapOvr>
+</p:sld>
+</file>
+
+<file path=ppt/slides/slide8.xml><?xml version="1.0" encoding="utf-8"?>
 <p:sld xmlns:a="http://schemas.openxmlformats.org/drawingml/2006/main" xmlns:r="http://schemas.openxmlformats.org/officeDocument/2006/relationships" xmlns:p="http://schemas.openxmlformats.org/presentationml/2006/main">
   <p:cSld>
     <p:spTree>
@@ -5599,7 +7038,7 @@
           <a:p>
             <a:fld id="{B2DC25EE-239B-4C5F-AAD1-255A7D5F1EE2}" type="slidenum">
               <a:rPr lang="en-US" smtClean="0"/>
-              <a:t>10</a:t>
+              <a:t>8</a:t>
             </a:fld>
             <a:endParaRPr lang="en-US" dirty="0"/>
           </a:p>
@@ -5691,7 +7130,7 @@
 </p:sld>
 </file>
 
-<file path=ppt/slides/slide11.xml><?xml version="1.0" encoding="utf-8"?>
+<file path=ppt/slides/slide9.xml><?xml version="1.0" encoding="utf-8"?>
 <p:sld xmlns:a="http://schemas.openxmlformats.org/drawingml/2006/main" xmlns:r="http://schemas.openxmlformats.org/officeDocument/2006/relationships" xmlns:p="http://schemas.openxmlformats.org/presentationml/2006/main">
   <p:cSld>
     <p:spTree>
@@ -5765,7 +7204,7 @@
           <a:p>
             <a:fld id="{B2DC25EE-239B-4C5F-AAD1-255A7D5F1EE2}" type="slidenum">
               <a:rPr lang="en-US" smtClean="0"/>
-              <a:t>11</a:t>
+              <a:t>9</a:t>
             </a:fld>
             <a:endParaRPr lang="en-US" dirty="0"/>
           </a:p>
@@ -5805,1710 +7244,6 @@
     <p:extLst>
       <p:ext uri="{BB962C8B-B14F-4D97-AF65-F5344CB8AC3E}">
         <p14:creationId xmlns:p14="http://schemas.microsoft.com/office/powerpoint/2010/main" val="3703524630"/>
-      </p:ext>
-    </p:extLst>
-  </p:cSld>
-  <p:clrMapOvr>
-    <a:masterClrMapping/>
-  </p:clrMapOvr>
-</p:sld>
-</file>
-
-<file path=ppt/slides/slide12.xml><?xml version="1.0" encoding="utf-8"?>
-<p:sld xmlns:a="http://schemas.openxmlformats.org/drawingml/2006/main" xmlns:r="http://schemas.openxmlformats.org/officeDocument/2006/relationships" xmlns:p="http://schemas.openxmlformats.org/presentationml/2006/main">
-  <p:cSld>
-    <p:spTree>
-      <p:nvGrpSpPr>
-        <p:cNvPr id="1" name="">
-          <a:extLst>
-            <a:ext uri="{FF2B5EF4-FFF2-40B4-BE49-F238E27FC236}">
-              <a16:creationId xmlns:a16="http://schemas.microsoft.com/office/drawing/2014/main" id="{428E3AF3-6A15-8717-C4B1-A956B5916EAD}"/>
-            </a:ext>
-          </a:extLst>
-        </p:cNvPr>
-        <p:cNvGrpSpPr/>
-        <p:nvPr/>
-      </p:nvGrpSpPr>
-      <p:grpSpPr>
-        <a:xfrm>
-          <a:off x="0" y="0"/>
-          <a:ext cx="0" cy="0"/>
-          <a:chOff x="0" y="0"/>
-          <a:chExt cx="0" cy="0"/>
-        </a:xfrm>
-      </p:grpSpPr>
-      <p:sp>
-        <p:nvSpPr>
-          <p:cNvPr id="4" name="Marcador de número de diapositiva 3">
-            <a:extLst>
-              <a:ext uri="{FF2B5EF4-FFF2-40B4-BE49-F238E27FC236}">
-                <a16:creationId xmlns:a16="http://schemas.microsoft.com/office/drawing/2014/main" id="{84F5E553-D943-433A-BC33-728AA510286C}"/>
-              </a:ext>
-            </a:extLst>
-          </p:cNvPr>
-          <p:cNvSpPr>
-            <a:spLocks noGrp="1"/>
-          </p:cNvSpPr>
-          <p:nvPr>
-            <p:ph type="sldNum" sz="quarter" idx="12"/>
-          </p:nvPr>
-        </p:nvSpPr>
-        <p:spPr/>
-        <p:txBody>
-          <a:bodyPr/>
-          <a:lstStyle/>
-          <a:p>
-            <a:fld id="{B2DC25EE-239B-4C5F-AAD1-255A7D5F1EE2}" type="slidenum">
-              <a:rPr lang="en-US" smtClean="0"/>
-              <a:t>12</a:t>
-            </a:fld>
-            <a:endParaRPr lang="en-US" dirty="0"/>
-          </a:p>
-        </p:txBody>
-      </p:sp>
-      <p:sp>
-        <p:nvSpPr>
-          <p:cNvPr id="14" name="CuadroTexto 13">
-            <a:extLst>
-              <a:ext uri="{FF2B5EF4-FFF2-40B4-BE49-F238E27FC236}">
-                <a16:creationId xmlns:a16="http://schemas.microsoft.com/office/drawing/2014/main" id="{851A5A20-1BAF-67D2-D56E-F9672D70431F}"/>
-              </a:ext>
-            </a:extLst>
-          </p:cNvPr>
-          <p:cNvSpPr txBox="1"/>
-          <p:nvPr/>
-        </p:nvSpPr>
-        <p:spPr>
-          <a:xfrm>
-            <a:off x="428603" y="2198728"/>
-            <a:ext cx="11266092" cy="646331"/>
-          </a:xfrm>
-          <a:prstGeom prst="rect">
-            <a:avLst/>
-          </a:prstGeom>
-          <a:noFill/>
-        </p:spPr>
-        <p:txBody>
-          <a:bodyPr wrap="square" rtlCol="0">
-            <a:spAutoFit/>
-          </a:bodyPr>
-          <a:lstStyle/>
-          <a:p>
-            <a:pPr algn="just"/>
-            <a:endParaRPr lang="ca-ES" dirty="0"/>
-          </a:p>
-          <a:p>
-            <a:pPr algn="just"/>
-            <a:endParaRPr lang="ca-ES" dirty="0"/>
-          </a:p>
-        </p:txBody>
-      </p:sp>
-      <p:pic>
-        <p:nvPicPr>
-          <p:cNvPr id="5" name="Imagen 4">
-            <a:extLst>
-              <a:ext uri="{FF2B5EF4-FFF2-40B4-BE49-F238E27FC236}">
-                <a16:creationId xmlns:a16="http://schemas.microsoft.com/office/drawing/2014/main" id="{19749D88-7983-AF89-9570-60669988DFDE}"/>
-              </a:ext>
-            </a:extLst>
-          </p:cNvPr>
-          <p:cNvPicPr>
-            <a:picLocks noChangeAspect="1"/>
-          </p:cNvPicPr>
-          <p:nvPr/>
-        </p:nvPicPr>
-        <p:blipFill>
-          <a:blip r:embed="rId2">
-            <a:extLst>
-              <a:ext uri="{28A0092B-C50C-407E-A947-70E740481C1C}">
-                <a14:useLocalDpi xmlns:a14="http://schemas.microsoft.com/office/drawing/2010/main" val="0"/>
-              </a:ext>
-            </a:extLst>
-          </a:blip>
-          <a:stretch>
-            <a:fillRect/>
-          </a:stretch>
-        </p:blipFill>
-        <p:spPr>
-          <a:xfrm>
-            <a:off x="0" y="509218"/>
-            <a:ext cx="12192000" cy="5839563"/>
-          </a:xfrm>
-          <a:prstGeom prst="rect">
-            <a:avLst/>
-          </a:prstGeom>
-        </p:spPr>
-      </p:pic>
-    </p:spTree>
-    <p:extLst>
-      <p:ext uri="{BB962C8B-B14F-4D97-AF65-F5344CB8AC3E}">
-        <p14:creationId xmlns:p14="http://schemas.microsoft.com/office/powerpoint/2010/main" val="2745002148"/>
-      </p:ext>
-    </p:extLst>
-  </p:cSld>
-  <p:clrMapOvr>
-    <a:masterClrMapping/>
-  </p:clrMapOvr>
-</p:sld>
-</file>
-
-<file path=ppt/slides/slide13.xml><?xml version="1.0" encoding="utf-8"?>
-<p:sld xmlns:a="http://schemas.openxmlformats.org/drawingml/2006/main" xmlns:r="http://schemas.openxmlformats.org/officeDocument/2006/relationships" xmlns:p="http://schemas.openxmlformats.org/presentationml/2006/main">
-  <p:cSld>
-    <p:spTree>
-      <p:nvGrpSpPr>
-        <p:cNvPr id="1" name="">
-          <a:extLst>
-            <a:ext uri="{FF2B5EF4-FFF2-40B4-BE49-F238E27FC236}">
-              <a16:creationId xmlns:a16="http://schemas.microsoft.com/office/drawing/2014/main" id="{3632C1A4-C051-D310-F6C5-C2307EDDFF82}"/>
-            </a:ext>
-          </a:extLst>
-        </p:cNvPr>
-        <p:cNvGrpSpPr/>
-        <p:nvPr/>
-      </p:nvGrpSpPr>
-      <p:grpSpPr>
-        <a:xfrm>
-          <a:off x="0" y="0"/>
-          <a:ext cx="0" cy="0"/>
-          <a:chOff x="0" y="0"/>
-          <a:chExt cx="0" cy="0"/>
-        </a:xfrm>
-      </p:grpSpPr>
-      <p:sp>
-        <p:nvSpPr>
-          <p:cNvPr id="2" name="Título 1">
-            <a:extLst>
-              <a:ext uri="{FF2B5EF4-FFF2-40B4-BE49-F238E27FC236}">
-                <a16:creationId xmlns:a16="http://schemas.microsoft.com/office/drawing/2014/main" id="{A475A83C-4876-383E-ACED-D3B8852D534D}"/>
-              </a:ext>
-            </a:extLst>
-          </p:cNvPr>
-          <p:cNvSpPr>
-            <a:spLocks noGrp="1"/>
-          </p:cNvSpPr>
-          <p:nvPr>
-            <p:ph type="title"/>
-          </p:nvPr>
-        </p:nvSpPr>
-        <p:spPr/>
-        <p:txBody>
-          <a:bodyPr/>
-          <a:lstStyle/>
-          <a:p>
-            <a:r>
-              <a:rPr lang="ca-ES" dirty="0"/>
-              <a:t>Veure comandes pendents a repartir</a:t>
-            </a:r>
-          </a:p>
-        </p:txBody>
-      </p:sp>
-      <p:sp>
-        <p:nvSpPr>
-          <p:cNvPr id="4" name="Marcador de número de diapositiva 3">
-            <a:extLst>
-              <a:ext uri="{FF2B5EF4-FFF2-40B4-BE49-F238E27FC236}">
-                <a16:creationId xmlns:a16="http://schemas.microsoft.com/office/drawing/2014/main" id="{589FB742-A7AE-853F-C06A-D0915B918EEB}"/>
-              </a:ext>
-            </a:extLst>
-          </p:cNvPr>
-          <p:cNvSpPr>
-            <a:spLocks noGrp="1"/>
-          </p:cNvSpPr>
-          <p:nvPr>
-            <p:ph type="sldNum" sz="quarter" idx="12"/>
-          </p:nvPr>
-        </p:nvSpPr>
-        <p:spPr/>
-        <p:txBody>
-          <a:bodyPr/>
-          <a:lstStyle/>
-          <a:p>
-            <a:fld id="{B2DC25EE-239B-4C5F-AAD1-255A7D5F1EE2}" type="slidenum">
-              <a:rPr lang="en-US" smtClean="0"/>
-              <a:t>13</a:t>
-            </a:fld>
-            <a:endParaRPr lang="en-US" dirty="0"/>
-          </a:p>
-        </p:txBody>
-      </p:sp>
-      <p:pic>
-        <p:nvPicPr>
-          <p:cNvPr id="8" name="Imagen 7">
-            <a:extLst>
-              <a:ext uri="{FF2B5EF4-FFF2-40B4-BE49-F238E27FC236}">
-                <a16:creationId xmlns:a16="http://schemas.microsoft.com/office/drawing/2014/main" id="{41C7423A-8AC5-93F8-3F4D-9579336792CB}"/>
-              </a:ext>
-            </a:extLst>
-          </p:cNvPr>
-          <p:cNvPicPr>
-            <a:picLocks noChangeAspect="1"/>
-          </p:cNvPicPr>
-          <p:nvPr/>
-        </p:nvPicPr>
-        <p:blipFill>
-          <a:blip r:embed="rId2"/>
-          <a:stretch>
-            <a:fillRect/>
-          </a:stretch>
-        </p:blipFill>
-        <p:spPr>
-          <a:xfrm>
-            <a:off x="3651505" y="2332689"/>
-            <a:ext cx="4706007" cy="4305901"/>
-          </a:xfrm>
-          <a:prstGeom prst="rect">
-            <a:avLst/>
-          </a:prstGeom>
-        </p:spPr>
-      </p:pic>
-    </p:spTree>
-    <p:extLst>
-      <p:ext uri="{BB962C8B-B14F-4D97-AF65-F5344CB8AC3E}">
-        <p14:creationId xmlns:p14="http://schemas.microsoft.com/office/powerpoint/2010/main" val="1330446890"/>
-      </p:ext>
-    </p:extLst>
-  </p:cSld>
-  <p:clrMapOvr>
-    <a:masterClrMapping/>
-  </p:clrMapOvr>
-</p:sld>
-</file>
-
-<file path=ppt/slides/slide14.xml><?xml version="1.0" encoding="utf-8"?>
-<p:sld xmlns:a="http://schemas.openxmlformats.org/drawingml/2006/main" xmlns:r="http://schemas.openxmlformats.org/officeDocument/2006/relationships" xmlns:p="http://schemas.openxmlformats.org/presentationml/2006/main">
-  <p:cSld>
-    <p:spTree>
-      <p:nvGrpSpPr>
-        <p:cNvPr id="1" name="">
-          <a:extLst>
-            <a:ext uri="{FF2B5EF4-FFF2-40B4-BE49-F238E27FC236}">
-              <a16:creationId xmlns:a16="http://schemas.microsoft.com/office/drawing/2014/main" id="{47BE24D0-7BBA-FABD-5CBA-1AD3D9080EEC}"/>
-            </a:ext>
-          </a:extLst>
-        </p:cNvPr>
-        <p:cNvGrpSpPr/>
-        <p:nvPr/>
-      </p:nvGrpSpPr>
-      <p:grpSpPr>
-        <a:xfrm>
-          <a:off x="0" y="0"/>
-          <a:ext cx="0" cy="0"/>
-          <a:chOff x="0" y="0"/>
-          <a:chExt cx="0" cy="0"/>
-        </a:xfrm>
-      </p:grpSpPr>
-      <p:sp>
-        <p:nvSpPr>
-          <p:cNvPr id="4" name="Marcador de número de diapositiva 3">
-            <a:extLst>
-              <a:ext uri="{FF2B5EF4-FFF2-40B4-BE49-F238E27FC236}">
-                <a16:creationId xmlns:a16="http://schemas.microsoft.com/office/drawing/2014/main" id="{2FAE126D-1447-0D60-7980-11B426DFB0A0}"/>
-              </a:ext>
-            </a:extLst>
-          </p:cNvPr>
-          <p:cNvSpPr>
-            <a:spLocks noGrp="1"/>
-          </p:cNvSpPr>
-          <p:nvPr>
-            <p:ph type="sldNum" sz="quarter" idx="12"/>
-          </p:nvPr>
-        </p:nvSpPr>
-        <p:spPr/>
-        <p:txBody>
-          <a:bodyPr/>
-          <a:lstStyle/>
-          <a:p>
-            <a:fld id="{B2DC25EE-239B-4C5F-AAD1-255A7D5F1EE2}" type="slidenum">
-              <a:rPr lang="en-US" smtClean="0"/>
-              <a:t>14</a:t>
-            </a:fld>
-            <a:endParaRPr lang="en-US" dirty="0"/>
-          </a:p>
-        </p:txBody>
-      </p:sp>
-      <p:sp>
-        <p:nvSpPr>
-          <p:cNvPr id="14" name="CuadroTexto 13">
-            <a:extLst>
-              <a:ext uri="{FF2B5EF4-FFF2-40B4-BE49-F238E27FC236}">
-                <a16:creationId xmlns:a16="http://schemas.microsoft.com/office/drawing/2014/main" id="{5F7AA830-F69E-547C-0D05-F26067E5119D}"/>
-              </a:ext>
-            </a:extLst>
-          </p:cNvPr>
-          <p:cNvSpPr txBox="1"/>
-          <p:nvPr/>
-        </p:nvSpPr>
-        <p:spPr>
-          <a:xfrm>
-            <a:off x="428603" y="2198728"/>
-            <a:ext cx="11266092" cy="646331"/>
-          </a:xfrm>
-          <a:prstGeom prst="rect">
-            <a:avLst/>
-          </a:prstGeom>
-          <a:noFill/>
-        </p:spPr>
-        <p:txBody>
-          <a:bodyPr wrap="square" rtlCol="0">
-            <a:spAutoFit/>
-          </a:bodyPr>
-          <a:lstStyle/>
-          <a:p>
-            <a:pPr algn="just"/>
-            <a:endParaRPr lang="ca-ES" dirty="0"/>
-          </a:p>
-          <a:p>
-            <a:pPr algn="just"/>
-            <a:endParaRPr lang="ca-ES" dirty="0"/>
-          </a:p>
-        </p:txBody>
-      </p:sp>
-      <p:pic>
-        <p:nvPicPr>
-          <p:cNvPr id="3" name="Imagen 2">
-            <a:extLst>
-              <a:ext uri="{FF2B5EF4-FFF2-40B4-BE49-F238E27FC236}">
-                <a16:creationId xmlns:a16="http://schemas.microsoft.com/office/drawing/2014/main" id="{85523671-5DCA-AB98-A629-674D0142975D}"/>
-              </a:ext>
-            </a:extLst>
-          </p:cNvPr>
-          <p:cNvPicPr>
-            <a:picLocks noChangeAspect="1"/>
-          </p:cNvPicPr>
-          <p:nvPr/>
-        </p:nvPicPr>
-        <p:blipFill>
-          <a:blip r:embed="rId2">
-            <a:extLst>
-              <a:ext uri="{28A0092B-C50C-407E-A947-70E740481C1C}">
-                <a14:useLocalDpi xmlns:a14="http://schemas.microsoft.com/office/drawing/2010/main" val="0"/>
-              </a:ext>
-            </a:extLst>
-          </a:blip>
-          <a:stretch>
-            <a:fillRect/>
-          </a:stretch>
-        </p:blipFill>
-        <p:spPr>
-          <a:xfrm>
-            <a:off x="1446383" y="725993"/>
-            <a:ext cx="9299234" cy="5406014"/>
-          </a:xfrm>
-          <a:prstGeom prst="rect">
-            <a:avLst/>
-          </a:prstGeom>
-        </p:spPr>
-      </p:pic>
-    </p:spTree>
-    <p:extLst>
-      <p:ext uri="{BB962C8B-B14F-4D97-AF65-F5344CB8AC3E}">
-        <p14:creationId xmlns:p14="http://schemas.microsoft.com/office/powerpoint/2010/main" val="3165161432"/>
-      </p:ext>
-    </p:extLst>
-  </p:cSld>
-  <p:clrMapOvr>
-    <a:masterClrMapping/>
-  </p:clrMapOvr>
-</p:sld>
-</file>
-
-<file path=ppt/slides/slide15.xml><?xml version="1.0" encoding="utf-8"?>
-<p:sld xmlns:a="http://schemas.openxmlformats.org/drawingml/2006/main" xmlns:r="http://schemas.openxmlformats.org/officeDocument/2006/relationships" xmlns:p="http://schemas.openxmlformats.org/presentationml/2006/main">
-  <p:cSld>
-    <p:spTree>
-      <p:nvGrpSpPr>
-        <p:cNvPr id="1" name="">
-          <a:extLst>
-            <a:ext uri="{FF2B5EF4-FFF2-40B4-BE49-F238E27FC236}">
-              <a16:creationId xmlns:a16="http://schemas.microsoft.com/office/drawing/2014/main" id="{917BC502-3E3F-1478-9F4E-A0447B6188DB}"/>
-            </a:ext>
-          </a:extLst>
-        </p:cNvPr>
-        <p:cNvGrpSpPr/>
-        <p:nvPr/>
-      </p:nvGrpSpPr>
-      <p:grpSpPr>
-        <a:xfrm>
-          <a:off x="0" y="0"/>
-          <a:ext cx="0" cy="0"/>
-          <a:chOff x="0" y="0"/>
-          <a:chExt cx="0" cy="0"/>
-        </a:xfrm>
-      </p:grpSpPr>
-      <p:sp>
-        <p:nvSpPr>
-          <p:cNvPr id="2" name="Título 1">
-            <a:extLst>
-              <a:ext uri="{FF2B5EF4-FFF2-40B4-BE49-F238E27FC236}">
-                <a16:creationId xmlns:a16="http://schemas.microsoft.com/office/drawing/2014/main" id="{958E12FB-7C9B-7CC8-1D44-8EE494966EA9}"/>
-              </a:ext>
-            </a:extLst>
-          </p:cNvPr>
-          <p:cNvSpPr>
-            <a:spLocks noGrp="1"/>
-          </p:cNvSpPr>
-          <p:nvPr>
-            <p:ph type="title"/>
-          </p:nvPr>
-        </p:nvSpPr>
-        <p:spPr/>
-        <p:txBody>
-          <a:bodyPr/>
-          <a:lstStyle/>
-          <a:p>
-            <a:r>
-              <a:rPr lang="ca-ES" dirty="0"/>
-              <a:t>Acceptar comandes a repartir</a:t>
-            </a:r>
-          </a:p>
-        </p:txBody>
-      </p:sp>
-      <p:sp>
-        <p:nvSpPr>
-          <p:cNvPr id="4" name="Marcador de número de diapositiva 3">
-            <a:extLst>
-              <a:ext uri="{FF2B5EF4-FFF2-40B4-BE49-F238E27FC236}">
-                <a16:creationId xmlns:a16="http://schemas.microsoft.com/office/drawing/2014/main" id="{910961B6-9507-206C-1593-D9ED0517AD71}"/>
-              </a:ext>
-            </a:extLst>
-          </p:cNvPr>
-          <p:cNvSpPr>
-            <a:spLocks noGrp="1"/>
-          </p:cNvSpPr>
-          <p:nvPr>
-            <p:ph type="sldNum" sz="quarter" idx="12"/>
-          </p:nvPr>
-        </p:nvSpPr>
-        <p:spPr/>
-        <p:txBody>
-          <a:bodyPr/>
-          <a:lstStyle/>
-          <a:p>
-            <a:fld id="{B2DC25EE-239B-4C5F-AAD1-255A7D5F1EE2}" type="slidenum">
-              <a:rPr lang="en-US" smtClean="0"/>
-              <a:t>15</a:t>
-            </a:fld>
-            <a:endParaRPr lang="en-US" dirty="0"/>
-          </a:p>
-        </p:txBody>
-      </p:sp>
-      <p:pic>
-        <p:nvPicPr>
-          <p:cNvPr id="5" name="Imagen 4">
-            <a:extLst>
-              <a:ext uri="{FF2B5EF4-FFF2-40B4-BE49-F238E27FC236}">
-                <a16:creationId xmlns:a16="http://schemas.microsoft.com/office/drawing/2014/main" id="{D187E8EB-C7FB-12B8-1655-25AC2567226A}"/>
-              </a:ext>
-            </a:extLst>
-          </p:cNvPr>
-          <p:cNvPicPr>
-            <a:picLocks noChangeAspect="1"/>
-          </p:cNvPicPr>
-          <p:nvPr/>
-        </p:nvPicPr>
-        <p:blipFill>
-          <a:blip r:embed="rId2"/>
-          <a:stretch>
-            <a:fillRect/>
-          </a:stretch>
-        </p:blipFill>
-        <p:spPr>
-          <a:xfrm>
-            <a:off x="3651505" y="2307606"/>
-            <a:ext cx="4715533" cy="4315427"/>
-          </a:xfrm>
-          <a:prstGeom prst="rect">
-            <a:avLst/>
-          </a:prstGeom>
-        </p:spPr>
-      </p:pic>
-    </p:spTree>
-    <p:extLst>
-      <p:ext uri="{BB962C8B-B14F-4D97-AF65-F5344CB8AC3E}">
-        <p14:creationId xmlns:p14="http://schemas.microsoft.com/office/powerpoint/2010/main" val="163075127"/>
-      </p:ext>
-    </p:extLst>
-  </p:cSld>
-  <p:clrMapOvr>
-    <a:masterClrMapping/>
-  </p:clrMapOvr>
-</p:sld>
-</file>
-
-<file path=ppt/slides/slide16.xml><?xml version="1.0" encoding="utf-8"?>
-<p:sld xmlns:a="http://schemas.openxmlformats.org/drawingml/2006/main" xmlns:r="http://schemas.openxmlformats.org/officeDocument/2006/relationships" xmlns:p="http://schemas.openxmlformats.org/presentationml/2006/main">
-  <p:cSld>
-    <p:spTree>
-      <p:nvGrpSpPr>
-        <p:cNvPr id="1" name="">
-          <a:extLst>
-            <a:ext uri="{FF2B5EF4-FFF2-40B4-BE49-F238E27FC236}">
-              <a16:creationId xmlns:a16="http://schemas.microsoft.com/office/drawing/2014/main" id="{7FEB293A-C806-D336-1AC9-35357AC79175}"/>
-            </a:ext>
-          </a:extLst>
-        </p:cNvPr>
-        <p:cNvGrpSpPr/>
-        <p:nvPr/>
-      </p:nvGrpSpPr>
-      <p:grpSpPr>
-        <a:xfrm>
-          <a:off x="0" y="0"/>
-          <a:ext cx="0" cy="0"/>
-          <a:chOff x="0" y="0"/>
-          <a:chExt cx="0" cy="0"/>
-        </a:xfrm>
-      </p:grpSpPr>
-      <p:sp>
-        <p:nvSpPr>
-          <p:cNvPr id="4" name="Marcador de número de diapositiva 3">
-            <a:extLst>
-              <a:ext uri="{FF2B5EF4-FFF2-40B4-BE49-F238E27FC236}">
-                <a16:creationId xmlns:a16="http://schemas.microsoft.com/office/drawing/2014/main" id="{23A2BC6E-E1AE-394E-0730-9A7CD30284D8}"/>
-              </a:ext>
-            </a:extLst>
-          </p:cNvPr>
-          <p:cNvSpPr>
-            <a:spLocks noGrp="1"/>
-          </p:cNvSpPr>
-          <p:nvPr>
-            <p:ph type="sldNum" sz="quarter" idx="12"/>
-          </p:nvPr>
-        </p:nvSpPr>
-        <p:spPr/>
-        <p:txBody>
-          <a:bodyPr/>
-          <a:lstStyle/>
-          <a:p>
-            <a:fld id="{B2DC25EE-239B-4C5F-AAD1-255A7D5F1EE2}" type="slidenum">
-              <a:rPr lang="en-US" smtClean="0"/>
-              <a:t>16</a:t>
-            </a:fld>
-            <a:endParaRPr lang="en-US" dirty="0"/>
-          </a:p>
-        </p:txBody>
-      </p:sp>
-      <p:sp>
-        <p:nvSpPr>
-          <p:cNvPr id="14" name="CuadroTexto 13">
-            <a:extLst>
-              <a:ext uri="{FF2B5EF4-FFF2-40B4-BE49-F238E27FC236}">
-                <a16:creationId xmlns:a16="http://schemas.microsoft.com/office/drawing/2014/main" id="{40BA75B5-A266-01A3-574C-CE8D41393DEF}"/>
-              </a:ext>
-            </a:extLst>
-          </p:cNvPr>
-          <p:cNvSpPr txBox="1"/>
-          <p:nvPr/>
-        </p:nvSpPr>
-        <p:spPr>
-          <a:xfrm>
-            <a:off x="428603" y="2198728"/>
-            <a:ext cx="11266092" cy="646331"/>
-          </a:xfrm>
-          <a:prstGeom prst="rect">
-            <a:avLst/>
-          </a:prstGeom>
-          <a:noFill/>
-        </p:spPr>
-        <p:txBody>
-          <a:bodyPr wrap="square" rtlCol="0">
-            <a:spAutoFit/>
-          </a:bodyPr>
-          <a:lstStyle/>
-          <a:p>
-            <a:pPr algn="just"/>
-            <a:endParaRPr lang="ca-ES" dirty="0"/>
-          </a:p>
-          <a:p>
-            <a:pPr algn="just"/>
-            <a:endParaRPr lang="ca-ES" dirty="0"/>
-          </a:p>
-        </p:txBody>
-      </p:sp>
-      <p:pic>
-        <p:nvPicPr>
-          <p:cNvPr id="5" name="Imagen 4">
-            <a:extLst>
-              <a:ext uri="{FF2B5EF4-FFF2-40B4-BE49-F238E27FC236}">
-                <a16:creationId xmlns:a16="http://schemas.microsoft.com/office/drawing/2014/main" id="{F45A0F68-D9A0-0547-9527-AB1CDB7D00AE}"/>
-              </a:ext>
-            </a:extLst>
-          </p:cNvPr>
-          <p:cNvPicPr>
-            <a:picLocks noChangeAspect="1"/>
-          </p:cNvPicPr>
-          <p:nvPr/>
-        </p:nvPicPr>
-        <p:blipFill>
-          <a:blip r:embed="rId2">
-            <a:extLst>
-              <a:ext uri="{28A0092B-C50C-407E-A947-70E740481C1C}">
-                <a14:useLocalDpi xmlns:a14="http://schemas.microsoft.com/office/drawing/2010/main" val="0"/>
-              </a:ext>
-            </a:extLst>
-          </a:blip>
-          <a:stretch>
-            <a:fillRect/>
-          </a:stretch>
-        </p:blipFill>
-        <p:spPr>
-          <a:xfrm>
-            <a:off x="0" y="1342965"/>
-            <a:ext cx="12192000" cy="4172070"/>
-          </a:xfrm>
-          <a:prstGeom prst="rect">
-            <a:avLst/>
-          </a:prstGeom>
-        </p:spPr>
-      </p:pic>
-    </p:spTree>
-    <p:extLst>
-      <p:ext uri="{BB962C8B-B14F-4D97-AF65-F5344CB8AC3E}">
-        <p14:creationId xmlns:p14="http://schemas.microsoft.com/office/powerpoint/2010/main" val="646553207"/>
-      </p:ext>
-    </p:extLst>
-  </p:cSld>
-  <p:clrMapOvr>
-    <a:masterClrMapping/>
-  </p:clrMapOvr>
-</p:sld>
-</file>
-
-<file path=ppt/slides/slide2.xml><?xml version="1.0" encoding="utf-8"?>
-<p:sld xmlns:a="http://schemas.openxmlformats.org/drawingml/2006/main" xmlns:r="http://schemas.openxmlformats.org/officeDocument/2006/relationships" xmlns:p="http://schemas.openxmlformats.org/presentationml/2006/main">
-  <p:cSld>
-    <p:spTree>
-      <p:nvGrpSpPr>
-        <p:cNvPr id="1" name="">
-          <a:extLst>
-            <a:ext uri="{FF2B5EF4-FFF2-40B4-BE49-F238E27FC236}">
-              <a16:creationId xmlns:a16="http://schemas.microsoft.com/office/drawing/2014/main" id="{86A99B7B-0036-857E-8BF0-01E6B848A629}"/>
-            </a:ext>
-          </a:extLst>
-        </p:cNvPr>
-        <p:cNvGrpSpPr/>
-        <p:nvPr/>
-      </p:nvGrpSpPr>
-      <p:grpSpPr>
-        <a:xfrm>
-          <a:off x="0" y="0"/>
-          <a:ext cx="0" cy="0"/>
-          <a:chOff x="0" y="0"/>
-          <a:chExt cx="0" cy="0"/>
-        </a:xfrm>
-      </p:grpSpPr>
-      <p:sp>
-        <p:nvSpPr>
-          <p:cNvPr id="4" name="Marcador de número de diapositiva 3">
-            <a:extLst>
-              <a:ext uri="{FF2B5EF4-FFF2-40B4-BE49-F238E27FC236}">
-                <a16:creationId xmlns:a16="http://schemas.microsoft.com/office/drawing/2014/main" id="{AA325085-339B-27C7-F6BB-CB9A4528132A}"/>
-              </a:ext>
-            </a:extLst>
-          </p:cNvPr>
-          <p:cNvSpPr>
-            <a:spLocks noGrp="1"/>
-          </p:cNvSpPr>
-          <p:nvPr>
-            <p:ph type="sldNum" sz="quarter" idx="12"/>
-          </p:nvPr>
-        </p:nvSpPr>
-        <p:spPr/>
-        <p:txBody>
-          <a:bodyPr/>
-          <a:lstStyle/>
-          <a:p>
-            <a:fld id="{B2DC25EE-239B-4C5F-AAD1-255A7D5F1EE2}" type="slidenum">
-              <a:rPr lang="en-US" smtClean="0"/>
-              <a:t>2</a:t>
-            </a:fld>
-            <a:endParaRPr lang="en-US" dirty="0"/>
-          </a:p>
-        </p:txBody>
-      </p:sp>
-      <p:sp>
-        <p:nvSpPr>
-          <p:cNvPr id="14" name="CuadroTexto 13">
-            <a:extLst>
-              <a:ext uri="{FF2B5EF4-FFF2-40B4-BE49-F238E27FC236}">
-                <a16:creationId xmlns:a16="http://schemas.microsoft.com/office/drawing/2014/main" id="{E21E6883-1652-5FF1-1B91-2A181A7389C5}"/>
-              </a:ext>
-            </a:extLst>
-          </p:cNvPr>
-          <p:cNvSpPr txBox="1"/>
-          <p:nvPr/>
-        </p:nvSpPr>
-        <p:spPr>
-          <a:xfrm>
-            <a:off x="428603" y="2198728"/>
-            <a:ext cx="11266092" cy="646331"/>
-          </a:xfrm>
-          <a:prstGeom prst="rect">
-            <a:avLst/>
-          </a:prstGeom>
-          <a:noFill/>
-        </p:spPr>
-        <p:txBody>
-          <a:bodyPr wrap="square" rtlCol="0">
-            <a:spAutoFit/>
-          </a:bodyPr>
-          <a:lstStyle/>
-          <a:p>
-            <a:pPr algn="just"/>
-            <a:endParaRPr lang="ca-ES" dirty="0"/>
-          </a:p>
-          <a:p>
-            <a:pPr algn="just"/>
-            <a:endParaRPr lang="ca-ES" dirty="0"/>
-          </a:p>
-        </p:txBody>
-      </p:sp>
-      <p:pic>
-        <p:nvPicPr>
-          <p:cNvPr id="5" name="Imagen 4">
-            <a:extLst>
-              <a:ext uri="{FF2B5EF4-FFF2-40B4-BE49-F238E27FC236}">
-                <a16:creationId xmlns:a16="http://schemas.microsoft.com/office/drawing/2014/main" id="{3411DE91-B827-7131-01CD-BE101FBBF6DA}"/>
-              </a:ext>
-            </a:extLst>
-          </p:cNvPr>
-          <p:cNvPicPr>
-            <a:picLocks noChangeAspect="1"/>
-          </p:cNvPicPr>
-          <p:nvPr/>
-        </p:nvPicPr>
-        <p:blipFill>
-          <a:blip r:embed="rId2">
-            <a:extLst>
-              <a:ext uri="{28A0092B-C50C-407E-A947-70E740481C1C}">
-                <a14:useLocalDpi xmlns:a14="http://schemas.microsoft.com/office/drawing/2010/main" val="0"/>
-              </a:ext>
-            </a:extLst>
-          </a:blip>
-          <a:stretch>
-            <a:fillRect/>
-          </a:stretch>
-        </p:blipFill>
-        <p:spPr>
-          <a:xfrm>
-            <a:off x="0" y="1342965"/>
-            <a:ext cx="12192000" cy="4172070"/>
-          </a:xfrm>
-          <a:prstGeom prst="rect">
-            <a:avLst/>
-          </a:prstGeom>
-        </p:spPr>
-      </p:pic>
-    </p:spTree>
-    <p:extLst>
-      <p:ext uri="{BB962C8B-B14F-4D97-AF65-F5344CB8AC3E}">
-        <p14:creationId xmlns:p14="http://schemas.microsoft.com/office/powerpoint/2010/main" val="3609801502"/>
-      </p:ext>
-    </p:extLst>
-  </p:cSld>
-  <p:clrMapOvr>
-    <a:masterClrMapping/>
-  </p:clrMapOvr>
-</p:sld>
-</file>
-
-<file path=ppt/slides/slide3.xml><?xml version="1.0" encoding="utf-8"?>
-<p:sld xmlns:a="http://schemas.openxmlformats.org/drawingml/2006/main" xmlns:r="http://schemas.openxmlformats.org/officeDocument/2006/relationships" xmlns:p="http://schemas.openxmlformats.org/presentationml/2006/main">
-  <p:cSld>
-    <p:spTree>
-      <p:nvGrpSpPr>
-        <p:cNvPr id="1" name="">
-          <a:extLst>
-            <a:ext uri="{FF2B5EF4-FFF2-40B4-BE49-F238E27FC236}">
-              <a16:creationId xmlns:a16="http://schemas.microsoft.com/office/drawing/2014/main" id="{8B9A2214-28AD-53CC-C129-770909414F2B}"/>
-            </a:ext>
-          </a:extLst>
-        </p:cNvPr>
-        <p:cNvGrpSpPr/>
-        <p:nvPr/>
-      </p:nvGrpSpPr>
-      <p:grpSpPr>
-        <a:xfrm>
-          <a:off x="0" y="0"/>
-          <a:ext cx="0" cy="0"/>
-          <a:chOff x="0" y="0"/>
-          <a:chExt cx="0" cy="0"/>
-        </a:xfrm>
-      </p:grpSpPr>
-      <p:sp>
-        <p:nvSpPr>
-          <p:cNvPr id="2" name="Título 1">
-            <a:extLst>
-              <a:ext uri="{FF2B5EF4-FFF2-40B4-BE49-F238E27FC236}">
-                <a16:creationId xmlns:a16="http://schemas.microsoft.com/office/drawing/2014/main" id="{A5AF6B09-6469-4C1D-2F19-0B86AED03750}"/>
-              </a:ext>
-            </a:extLst>
-          </p:cNvPr>
-          <p:cNvSpPr>
-            <a:spLocks noGrp="1"/>
-          </p:cNvSpPr>
-          <p:nvPr>
-            <p:ph type="title"/>
-          </p:nvPr>
-        </p:nvSpPr>
-        <p:spPr/>
-        <p:txBody>
-          <a:bodyPr/>
-          <a:lstStyle/>
-          <a:p>
-            <a:r>
-              <a:rPr lang="ca-ES" dirty="0"/>
-              <a:t>Valorar comandes</a:t>
-            </a:r>
-          </a:p>
-        </p:txBody>
-      </p:sp>
-      <p:sp>
-        <p:nvSpPr>
-          <p:cNvPr id="4" name="Marcador de número de diapositiva 3">
-            <a:extLst>
-              <a:ext uri="{FF2B5EF4-FFF2-40B4-BE49-F238E27FC236}">
-                <a16:creationId xmlns:a16="http://schemas.microsoft.com/office/drawing/2014/main" id="{F480ACCD-DB47-CB81-820C-83FD31056D8C}"/>
-              </a:ext>
-            </a:extLst>
-          </p:cNvPr>
-          <p:cNvSpPr>
-            <a:spLocks noGrp="1"/>
-          </p:cNvSpPr>
-          <p:nvPr>
-            <p:ph type="sldNum" sz="quarter" idx="12"/>
-          </p:nvPr>
-        </p:nvSpPr>
-        <p:spPr/>
-        <p:txBody>
-          <a:bodyPr/>
-          <a:lstStyle/>
-          <a:p>
-            <a:fld id="{B2DC25EE-239B-4C5F-AAD1-255A7D5F1EE2}" type="slidenum">
-              <a:rPr lang="en-US" smtClean="0"/>
-              <a:t>3</a:t>
-            </a:fld>
-            <a:endParaRPr lang="en-US" dirty="0"/>
-          </a:p>
-        </p:txBody>
-      </p:sp>
-      <p:pic>
-        <p:nvPicPr>
-          <p:cNvPr id="5" name="Imagen 4">
-            <a:extLst>
-              <a:ext uri="{FF2B5EF4-FFF2-40B4-BE49-F238E27FC236}">
-                <a16:creationId xmlns:a16="http://schemas.microsoft.com/office/drawing/2014/main" id="{E7E8D3AC-B2F0-31A3-3BDA-FC19777F5BF3}"/>
-              </a:ext>
-            </a:extLst>
-          </p:cNvPr>
-          <p:cNvPicPr>
-            <a:picLocks noChangeAspect="1"/>
-          </p:cNvPicPr>
-          <p:nvPr/>
-        </p:nvPicPr>
-        <p:blipFill>
-          <a:blip r:embed="rId2"/>
-          <a:stretch>
-            <a:fillRect/>
-          </a:stretch>
-        </p:blipFill>
-        <p:spPr>
-          <a:xfrm>
-            <a:off x="3742996" y="2104362"/>
-            <a:ext cx="4706007" cy="4753638"/>
-          </a:xfrm>
-          <a:prstGeom prst="rect">
-            <a:avLst/>
-          </a:prstGeom>
-        </p:spPr>
-      </p:pic>
-    </p:spTree>
-    <p:extLst>
-      <p:ext uri="{BB962C8B-B14F-4D97-AF65-F5344CB8AC3E}">
-        <p14:creationId xmlns:p14="http://schemas.microsoft.com/office/powerpoint/2010/main" val="3425358888"/>
-      </p:ext>
-    </p:extLst>
-  </p:cSld>
-  <p:clrMapOvr>
-    <a:masterClrMapping/>
-  </p:clrMapOvr>
-</p:sld>
-</file>
-
-<file path=ppt/slides/slide4.xml><?xml version="1.0" encoding="utf-8"?>
-<p:sld xmlns:a="http://schemas.openxmlformats.org/drawingml/2006/main" xmlns:r="http://schemas.openxmlformats.org/officeDocument/2006/relationships" xmlns:p="http://schemas.openxmlformats.org/presentationml/2006/main">
-  <p:cSld>
-    <p:spTree>
-      <p:nvGrpSpPr>
-        <p:cNvPr id="1" name="">
-          <a:extLst>
-            <a:ext uri="{FF2B5EF4-FFF2-40B4-BE49-F238E27FC236}">
-              <a16:creationId xmlns:a16="http://schemas.microsoft.com/office/drawing/2014/main" id="{36989573-EFED-57BE-F89C-AE8300493772}"/>
-            </a:ext>
-          </a:extLst>
-        </p:cNvPr>
-        <p:cNvGrpSpPr/>
-        <p:nvPr/>
-      </p:nvGrpSpPr>
-      <p:grpSpPr>
-        <a:xfrm>
-          <a:off x="0" y="0"/>
-          <a:ext cx="0" cy="0"/>
-          <a:chOff x="0" y="0"/>
-          <a:chExt cx="0" cy="0"/>
-        </a:xfrm>
-      </p:grpSpPr>
-      <p:sp>
-        <p:nvSpPr>
-          <p:cNvPr id="4" name="Marcador de número de diapositiva 3">
-            <a:extLst>
-              <a:ext uri="{FF2B5EF4-FFF2-40B4-BE49-F238E27FC236}">
-                <a16:creationId xmlns:a16="http://schemas.microsoft.com/office/drawing/2014/main" id="{96148110-E30E-3D01-8DD3-C818C66A630A}"/>
-              </a:ext>
-            </a:extLst>
-          </p:cNvPr>
-          <p:cNvSpPr>
-            <a:spLocks noGrp="1"/>
-          </p:cNvSpPr>
-          <p:nvPr>
-            <p:ph type="sldNum" sz="quarter" idx="12"/>
-          </p:nvPr>
-        </p:nvSpPr>
-        <p:spPr/>
-        <p:txBody>
-          <a:bodyPr/>
-          <a:lstStyle/>
-          <a:p>
-            <a:fld id="{B2DC25EE-239B-4C5F-AAD1-255A7D5F1EE2}" type="slidenum">
-              <a:rPr lang="en-US" smtClean="0"/>
-              <a:t>4</a:t>
-            </a:fld>
-            <a:endParaRPr lang="en-US" dirty="0"/>
-          </a:p>
-        </p:txBody>
-      </p:sp>
-      <p:sp>
-        <p:nvSpPr>
-          <p:cNvPr id="14" name="CuadroTexto 13">
-            <a:extLst>
-              <a:ext uri="{FF2B5EF4-FFF2-40B4-BE49-F238E27FC236}">
-                <a16:creationId xmlns:a16="http://schemas.microsoft.com/office/drawing/2014/main" id="{9DB182DC-B39B-F545-AD64-72840270D726}"/>
-              </a:ext>
-            </a:extLst>
-          </p:cNvPr>
-          <p:cNvSpPr txBox="1"/>
-          <p:nvPr/>
-        </p:nvSpPr>
-        <p:spPr>
-          <a:xfrm>
-            <a:off x="428603" y="2198728"/>
-            <a:ext cx="11266092" cy="646331"/>
-          </a:xfrm>
-          <a:prstGeom prst="rect">
-            <a:avLst/>
-          </a:prstGeom>
-          <a:noFill/>
-        </p:spPr>
-        <p:txBody>
-          <a:bodyPr wrap="square" rtlCol="0">
-            <a:spAutoFit/>
-          </a:bodyPr>
-          <a:lstStyle/>
-          <a:p>
-            <a:pPr algn="just"/>
-            <a:endParaRPr lang="ca-ES" dirty="0"/>
-          </a:p>
-          <a:p>
-            <a:pPr algn="just"/>
-            <a:endParaRPr lang="ca-ES" dirty="0"/>
-          </a:p>
-        </p:txBody>
-      </p:sp>
-      <p:pic>
-        <p:nvPicPr>
-          <p:cNvPr id="3" name="Imagen 2">
-            <a:extLst>
-              <a:ext uri="{FF2B5EF4-FFF2-40B4-BE49-F238E27FC236}">
-                <a16:creationId xmlns:a16="http://schemas.microsoft.com/office/drawing/2014/main" id="{0C4D667D-6529-BBCB-C2CA-6E7C0847B9BE}"/>
-              </a:ext>
-            </a:extLst>
-          </p:cNvPr>
-          <p:cNvPicPr>
-            <a:picLocks noChangeAspect="1"/>
-          </p:cNvPicPr>
-          <p:nvPr/>
-        </p:nvPicPr>
-        <p:blipFill>
-          <a:blip r:embed="rId2">
-            <a:extLst>
-              <a:ext uri="{28A0092B-C50C-407E-A947-70E740481C1C}">
-                <a14:useLocalDpi xmlns:a14="http://schemas.microsoft.com/office/drawing/2010/main" val="0"/>
-              </a:ext>
-            </a:extLst>
-          </a:blip>
-          <a:stretch>
-            <a:fillRect/>
-          </a:stretch>
-        </p:blipFill>
-        <p:spPr>
-          <a:xfrm>
-            <a:off x="1423987" y="395287"/>
-            <a:ext cx="9344025" cy="6067425"/>
-          </a:xfrm>
-          <a:prstGeom prst="rect">
-            <a:avLst/>
-          </a:prstGeom>
-        </p:spPr>
-      </p:pic>
-    </p:spTree>
-    <p:extLst>
-      <p:ext uri="{BB962C8B-B14F-4D97-AF65-F5344CB8AC3E}">
-        <p14:creationId xmlns:p14="http://schemas.microsoft.com/office/powerpoint/2010/main" val="996049454"/>
-      </p:ext>
-    </p:extLst>
-  </p:cSld>
-  <p:clrMapOvr>
-    <a:masterClrMapping/>
-  </p:clrMapOvr>
-</p:sld>
-</file>
-
-<file path=ppt/slides/slide5.xml><?xml version="1.0" encoding="utf-8"?>
-<p:sld xmlns:a="http://schemas.openxmlformats.org/drawingml/2006/main" xmlns:r="http://schemas.openxmlformats.org/officeDocument/2006/relationships" xmlns:p="http://schemas.openxmlformats.org/presentationml/2006/main">
-  <p:cSld>
-    <p:spTree>
-      <p:nvGrpSpPr>
-        <p:cNvPr id="1" name="">
-          <a:extLst>
-            <a:ext uri="{FF2B5EF4-FFF2-40B4-BE49-F238E27FC236}">
-              <a16:creationId xmlns:a16="http://schemas.microsoft.com/office/drawing/2014/main" id="{6B4B2E17-791B-9C93-B7D9-46F4439A3C2B}"/>
-            </a:ext>
-          </a:extLst>
-        </p:cNvPr>
-        <p:cNvGrpSpPr/>
-        <p:nvPr/>
-      </p:nvGrpSpPr>
-      <p:grpSpPr>
-        <a:xfrm>
-          <a:off x="0" y="0"/>
-          <a:ext cx="0" cy="0"/>
-          <a:chOff x="0" y="0"/>
-          <a:chExt cx="0" cy="0"/>
-        </a:xfrm>
-      </p:grpSpPr>
-      <p:sp>
-        <p:nvSpPr>
-          <p:cNvPr id="2" name="Título 1">
-            <a:extLst>
-              <a:ext uri="{FF2B5EF4-FFF2-40B4-BE49-F238E27FC236}">
-                <a16:creationId xmlns:a16="http://schemas.microsoft.com/office/drawing/2014/main" id="{E95BE9E7-D09F-27E3-721D-90D31399F73C}"/>
-              </a:ext>
-            </a:extLst>
-          </p:cNvPr>
-          <p:cNvSpPr>
-            <a:spLocks noGrp="1"/>
-          </p:cNvSpPr>
-          <p:nvPr>
-            <p:ph type="title"/>
-          </p:nvPr>
-        </p:nvSpPr>
-        <p:spPr/>
-        <p:txBody>
-          <a:bodyPr/>
-          <a:lstStyle/>
-          <a:p>
-            <a:r>
-              <a:rPr lang="ca-ES" dirty="0"/>
-              <a:t>Fer comandes</a:t>
-            </a:r>
-          </a:p>
-        </p:txBody>
-      </p:sp>
-      <p:sp>
-        <p:nvSpPr>
-          <p:cNvPr id="4" name="Marcador de número de diapositiva 3">
-            <a:extLst>
-              <a:ext uri="{FF2B5EF4-FFF2-40B4-BE49-F238E27FC236}">
-                <a16:creationId xmlns:a16="http://schemas.microsoft.com/office/drawing/2014/main" id="{7065462A-F4CA-BDDF-5CA8-BFDC36D6719C}"/>
-              </a:ext>
-            </a:extLst>
-          </p:cNvPr>
-          <p:cNvSpPr>
-            <a:spLocks noGrp="1"/>
-          </p:cNvSpPr>
-          <p:nvPr>
-            <p:ph type="sldNum" sz="quarter" idx="12"/>
-          </p:nvPr>
-        </p:nvSpPr>
-        <p:spPr/>
-        <p:txBody>
-          <a:bodyPr/>
-          <a:lstStyle/>
-          <a:p>
-            <a:fld id="{B2DC25EE-239B-4C5F-AAD1-255A7D5F1EE2}" type="slidenum">
-              <a:rPr lang="en-US" smtClean="0"/>
-              <a:t>5</a:t>
-            </a:fld>
-            <a:endParaRPr lang="en-US" dirty="0"/>
-          </a:p>
-        </p:txBody>
-      </p:sp>
-      <p:pic>
-        <p:nvPicPr>
-          <p:cNvPr id="5" name="Imagen 4">
-            <a:extLst>
-              <a:ext uri="{FF2B5EF4-FFF2-40B4-BE49-F238E27FC236}">
-                <a16:creationId xmlns:a16="http://schemas.microsoft.com/office/drawing/2014/main" id="{557CEFE5-51C3-F6EE-74D4-56511FCB0395}"/>
-              </a:ext>
-            </a:extLst>
-          </p:cNvPr>
-          <p:cNvPicPr>
-            <a:picLocks noChangeAspect="1"/>
-          </p:cNvPicPr>
-          <p:nvPr/>
-        </p:nvPicPr>
-        <p:blipFill>
-          <a:blip r:embed="rId2"/>
-          <a:stretch>
-            <a:fillRect/>
-          </a:stretch>
-        </p:blipFill>
-        <p:spPr>
-          <a:xfrm>
-            <a:off x="3906148" y="2008155"/>
-            <a:ext cx="4207705" cy="4849845"/>
-          </a:xfrm>
-          <a:prstGeom prst="rect">
-            <a:avLst/>
-          </a:prstGeom>
-        </p:spPr>
-      </p:pic>
-    </p:spTree>
-    <p:extLst>
-      <p:ext uri="{BB962C8B-B14F-4D97-AF65-F5344CB8AC3E}">
-        <p14:creationId xmlns:p14="http://schemas.microsoft.com/office/powerpoint/2010/main" val="720226807"/>
-      </p:ext>
-    </p:extLst>
-  </p:cSld>
-  <p:clrMapOvr>
-    <a:masterClrMapping/>
-  </p:clrMapOvr>
-</p:sld>
-</file>
-
-<file path=ppt/slides/slide6.xml><?xml version="1.0" encoding="utf-8"?>
-<p:sld xmlns:a="http://schemas.openxmlformats.org/drawingml/2006/main" xmlns:r="http://schemas.openxmlformats.org/officeDocument/2006/relationships" xmlns:p="http://schemas.openxmlformats.org/presentationml/2006/main">
-  <p:cSld>
-    <p:spTree>
-      <p:nvGrpSpPr>
-        <p:cNvPr id="1" name="">
-          <a:extLst>
-            <a:ext uri="{FF2B5EF4-FFF2-40B4-BE49-F238E27FC236}">
-              <a16:creationId xmlns:a16="http://schemas.microsoft.com/office/drawing/2014/main" id="{6FB3CCF0-3304-B202-3BDE-65A05A0C11F0}"/>
-            </a:ext>
-          </a:extLst>
-        </p:cNvPr>
-        <p:cNvGrpSpPr/>
-        <p:nvPr/>
-      </p:nvGrpSpPr>
-      <p:grpSpPr>
-        <a:xfrm>
-          <a:off x="0" y="0"/>
-          <a:ext cx="0" cy="0"/>
-          <a:chOff x="0" y="0"/>
-          <a:chExt cx="0" cy="0"/>
-        </a:xfrm>
-      </p:grpSpPr>
-      <p:sp>
-        <p:nvSpPr>
-          <p:cNvPr id="4" name="Marcador de número de diapositiva 3">
-            <a:extLst>
-              <a:ext uri="{FF2B5EF4-FFF2-40B4-BE49-F238E27FC236}">
-                <a16:creationId xmlns:a16="http://schemas.microsoft.com/office/drawing/2014/main" id="{5EBD482D-DB08-6118-D4B5-A51A2EADA6F8}"/>
-              </a:ext>
-            </a:extLst>
-          </p:cNvPr>
-          <p:cNvSpPr>
-            <a:spLocks noGrp="1"/>
-          </p:cNvSpPr>
-          <p:nvPr>
-            <p:ph type="sldNum" sz="quarter" idx="12"/>
-          </p:nvPr>
-        </p:nvSpPr>
-        <p:spPr/>
-        <p:txBody>
-          <a:bodyPr/>
-          <a:lstStyle/>
-          <a:p>
-            <a:fld id="{B2DC25EE-239B-4C5F-AAD1-255A7D5F1EE2}" type="slidenum">
-              <a:rPr lang="en-US" smtClean="0"/>
-              <a:t>6</a:t>
-            </a:fld>
-            <a:endParaRPr lang="en-US" dirty="0"/>
-          </a:p>
-        </p:txBody>
-      </p:sp>
-      <p:sp>
-        <p:nvSpPr>
-          <p:cNvPr id="14" name="CuadroTexto 13">
-            <a:extLst>
-              <a:ext uri="{FF2B5EF4-FFF2-40B4-BE49-F238E27FC236}">
-                <a16:creationId xmlns:a16="http://schemas.microsoft.com/office/drawing/2014/main" id="{A726846D-7829-9063-BDD1-04CA2DACE228}"/>
-              </a:ext>
-            </a:extLst>
-          </p:cNvPr>
-          <p:cNvSpPr txBox="1"/>
-          <p:nvPr/>
-        </p:nvSpPr>
-        <p:spPr>
-          <a:xfrm>
-            <a:off x="428603" y="2198728"/>
-            <a:ext cx="11266092" cy="646331"/>
-          </a:xfrm>
-          <a:prstGeom prst="rect">
-            <a:avLst/>
-          </a:prstGeom>
-          <a:noFill/>
-        </p:spPr>
-        <p:txBody>
-          <a:bodyPr wrap="square" rtlCol="0">
-            <a:spAutoFit/>
-          </a:bodyPr>
-          <a:lstStyle/>
-          <a:p>
-            <a:pPr algn="just"/>
-            <a:endParaRPr lang="ca-ES" dirty="0"/>
-          </a:p>
-          <a:p>
-            <a:pPr algn="just"/>
-            <a:endParaRPr lang="ca-ES" dirty="0"/>
-          </a:p>
-        </p:txBody>
-      </p:sp>
-      <p:pic>
-        <p:nvPicPr>
-          <p:cNvPr id="3" name="Imagen 2">
-            <a:extLst>
-              <a:ext uri="{FF2B5EF4-FFF2-40B4-BE49-F238E27FC236}">
-                <a16:creationId xmlns:a16="http://schemas.microsoft.com/office/drawing/2014/main" id="{D26B1A8C-2479-2DB9-9DD8-73D905AB0AD9}"/>
-              </a:ext>
-            </a:extLst>
-          </p:cNvPr>
-          <p:cNvPicPr>
-            <a:picLocks noChangeAspect="1"/>
-          </p:cNvPicPr>
-          <p:nvPr/>
-        </p:nvPicPr>
-        <p:blipFill>
-          <a:blip r:embed="rId2">
-            <a:extLst>
-              <a:ext uri="{28A0092B-C50C-407E-A947-70E740481C1C}">
-                <a14:useLocalDpi xmlns:a14="http://schemas.microsoft.com/office/drawing/2010/main" val="0"/>
-              </a:ext>
-            </a:extLst>
-          </a:blip>
-          <a:stretch>
-            <a:fillRect/>
-          </a:stretch>
-        </p:blipFill>
-        <p:spPr>
-          <a:xfrm>
-            <a:off x="581025" y="223837"/>
-            <a:ext cx="11029950" cy="6410325"/>
-          </a:xfrm>
-          <a:prstGeom prst="rect">
-            <a:avLst/>
-          </a:prstGeom>
-        </p:spPr>
-      </p:pic>
-    </p:spTree>
-    <p:extLst>
-      <p:ext uri="{BB962C8B-B14F-4D97-AF65-F5344CB8AC3E}">
-        <p14:creationId xmlns:p14="http://schemas.microsoft.com/office/powerpoint/2010/main" val="2949212560"/>
-      </p:ext>
-    </p:extLst>
-  </p:cSld>
-  <p:clrMapOvr>
-    <a:masterClrMapping/>
-  </p:clrMapOvr>
-</p:sld>
-</file>
-
-<file path=ppt/slides/slide7.xml><?xml version="1.0" encoding="utf-8"?>
-<p:sld xmlns:a="http://schemas.openxmlformats.org/drawingml/2006/main" xmlns:r="http://schemas.openxmlformats.org/officeDocument/2006/relationships" xmlns:p="http://schemas.openxmlformats.org/presentationml/2006/main">
-  <p:cSld>
-    <p:spTree>
-      <p:nvGrpSpPr>
-        <p:cNvPr id="1" name="">
-          <a:extLst>
-            <a:ext uri="{FF2B5EF4-FFF2-40B4-BE49-F238E27FC236}">
-              <a16:creationId xmlns:a16="http://schemas.microsoft.com/office/drawing/2014/main" id="{ED84160F-D158-5DC9-0F5D-560F9184100A}"/>
-            </a:ext>
-          </a:extLst>
-        </p:cNvPr>
-        <p:cNvGrpSpPr/>
-        <p:nvPr/>
-      </p:nvGrpSpPr>
-      <p:grpSpPr>
-        <a:xfrm>
-          <a:off x="0" y="0"/>
-          <a:ext cx="0" cy="0"/>
-          <a:chOff x="0" y="0"/>
-          <a:chExt cx="0" cy="0"/>
-        </a:xfrm>
-      </p:grpSpPr>
-      <p:sp>
-        <p:nvSpPr>
-          <p:cNvPr id="2" name="Título 1">
-            <a:extLst>
-              <a:ext uri="{FF2B5EF4-FFF2-40B4-BE49-F238E27FC236}">
-                <a16:creationId xmlns:a16="http://schemas.microsoft.com/office/drawing/2014/main" id="{4F2964DB-5A90-BEEC-4CA2-5181B9405AE0}"/>
-              </a:ext>
-            </a:extLst>
-          </p:cNvPr>
-          <p:cNvSpPr>
-            <a:spLocks noGrp="1"/>
-          </p:cNvSpPr>
-          <p:nvPr>
-            <p:ph type="title"/>
-          </p:nvPr>
-        </p:nvSpPr>
-        <p:spPr/>
-        <p:txBody>
-          <a:bodyPr/>
-          <a:lstStyle/>
-          <a:p>
-            <a:r>
-              <a:rPr lang="ca-ES" dirty="0"/>
-              <a:t>Modificar ingredients addicionals</a:t>
-            </a:r>
-          </a:p>
-        </p:txBody>
-      </p:sp>
-      <p:sp>
-        <p:nvSpPr>
-          <p:cNvPr id="4" name="Marcador de número de diapositiva 3">
-            <a:extLst>
-              <a:ext uri="{FF2B5EF4-FFF2-40B4-BE49-F238E27FC236}">
-                <a16:creationId xmlns:a16="http://schemas.microsoft.com/office/drawing/2014/main" id="{4D1BBE72-D159-6268-FF37-F17E260CAEB5}"/>
-              </a:ext>
-            </a:extLst>
-          </p:cNvPr>
-          <p:cNvSpPr>
-            <a:spLocks noGrp="1"/>
-          </p:cNvSpPr>
-          <p:nvPr>
-            <p:ph type="sldNum" sz="quarter" idx="12"/>
-          </p:nvPr>
-        </p:nvSpPr>
-        <p:spPr/>
-        <p:txBody>
-          <a:bodyPr/>
-          <a:lstStyle/>
-          <a:p>
-            <a:fld id="{B2DC25EE-239B-4C5F-AAD1-255A7D5F1EE2}" type="slidenum">
-              <a:rPr lang="en-US" smtClean="0"/>
-              <a:t>7</a:t>
-            </a:fld>
-            <a:endParaRPr lang="en-US" dirty="0"/>
-          </a:p>
-        </p:txBody>
-      </p:sp>
-      <p:pic>
-        <p:nvPicPr>
-          <p:cNvPr id="6" name="Imagen 5">
-            <a:extLst>
-              <a:ext uri="{FF2B5EF4-FFF2-40B4-BE49-F238E27FC236}">
-                <a16:creationId xmlns:a16="http://schemas.microsoft.com/office/drawing/2014/main" id="{36301A94-89A8-23A7-7967-1E63DFD3B0F7}"/>
-              </a:ext>
-            </a:extLst>
-          </p:cNvPr>
-          <p:cNvPicPr>
-            <a:picLocks noChangeAspect="1"/>
-          </p:cNvPicPr>
-          <p:nvPr/>
-        </p:nvPicPr>
-        <p:blipFill>
-          <a:blip r:embed="rId2"/>
-          <a:stretch>
-            <a:fillRect/>
-          </a:stretch>
-        </p:blipFill>
-        <p:spPr>
-          <a:xfrm>
-            <a:off x="3694356" y="2148837"/>
-            <a:ext cx="4734586" cy="4572638"/>
-          </a:xfrm>
-          <a:prstGeom prst="rect">
-            <a:avLst/>
-          </a:prstGeom>
-        </p:spPr>
-      </p:pic>
-    </p:spTree>
-    <p:extLst>
-      <p:ext uri="{BB962C8B-B14F-4D97-AF65-F5344CB8AC3E}">
-        <p14:creationId xmlns:p14="http://schemas.microsoft.com/office/powerpoint/2010/main" val="2514987296"/>
-      </p:ext>
-    </p:extLst>
-  </p:cSld>
-  <p:clrMapOvr>
-    <a:masterClrMapping/>
-  </p:clrMapOvr>
-</p:sld>
-</file>
-
-<file path=ppt/slides/slide8.xml><?xml version="1.0" encoding="utf-8"?>
-<p:sld xmlns:a="http://schemas.openxmlformats.org/drawingml/2006/main" xmlns:r="http://schemas.openxmlformats.org/officeDocument/2006/relationships" xmlns:p="http://schemas.openxmlformats.org/presentationml/2006/main">
-  <p:cSld>
-    <p:spTree>
-      <p:nvGrpSpPr>
-        <p:cNvPr id="1" name="">
-          <a:extLst>
-            <a:ext uri="{FF2B5EF4-FFF2-40B4-BE49-F238E27FC236}">
-              <a16:creationId xmlns:a16="http://schemas.microsoft.com/office/drawing/2014/main" id="{2B12653F-27BB-D47E-9728-92A6A69E3361}"/>
-            </a:ext>
-          </a:extLst>
-        </p:cNvPr>
-        <p:cNvGrpSpPr/>
-        <p:nvPr/>
-      </p:nvGrpSpPr>
-      <p:grpSpPr>
-        <a:xfrm>
-          <a:off x="0" y="0"/>
-          <a:ext cx="0" cy="0"/>
-          <a:chOff x="0" y="0"/>
-          <a:chExt cx="0" cy="0"/>
-        </a:xfrm>
-      </p:grpSpPr>
-      <p:sp>
-        <p:nvSpPr>
-          <p:cNvPr id="4" name="Marcador de número de diapositiva 3">
-            <a:extLst>
-              <a:ext uri="{FF2B5EF4-FFF2-40B4-BE49-F238E27FC236}">
-                <a16:creationId xmlns:a16="http://schemas.microsoft.com/office/drawing/2014/main" id="{217964F3-1F4C-EB58-646A-EC18EFF6D309}"/>
-              </a:ext>
-            </a:extLst>
-          </p:cNvPr>
-          <p:cNvSpPr>
-            <a:spLocks noGrp="1"/>
-          </p:cNvSpPr>
-          <p:nvPr>
-            <p:ph type="sldNum" sz="quarter" idx="12"/>
-          </p:nvPr>
-        </p:nvSpPr>
-        <p:spPr/>
-        <p:txBody>
-          <a:bodyPr/>
-          <a:lstStyle/>
-          <a:p>
-            <a:fld id="{B2DC25EE-239B-4C5F-AAD1-255A7D5F1EE2}" type="slidenum">
-              <a:rPr lang="en-US" smtClean="0"/>
-              <a:t>8</a:t>
-            </a:fld>
-            <a:endParaRPr lang="en-US" dirty="0"/>
-          </a:p>
-        </p:txBody>
-      </p:sp>
-      <p:sp>
-        <p:nvSpPr>
-          <p:cNvPr id="14" name="CuadroTexto 13">
-            <a:extLst>
-              <a:ext uri="{FF2B5EF4-FFF2-40B4-BE49-F238E27FC236}">
-                <a16:creationId xmlns:a16="http://schemas.microsoft.com/office/drawing/2014/main" id="{E73EB9B1-4806-417C-97D3-F28C17038ACD}"/>
-              </a:ext>
-            </a:extLst>
-          </p:cNvPr>
-          <p:cNvSpPr txBox="1"/>
-          <p:nvPr/>
-        </p:nvSpPr>
-        <p:spPr>
-          <a:xfrm>
-            <a:off x="428603" y="2198728"/>
-            <a:ext cx="11266092" cy="646331"/>
-          </a:xfrm>
-          <a:prstGeom prst="rect">
-            <a:avLst/>
-          </a:prstGeom>
-          <a:noFill/>
-        </p:spPr>
-        <p:txBody>
-          <a:bodyPr wrap="square" rtlCol="0">
-            <a:spAutoFit/>
-          </a:bodyPr>
-          <a:lstStyle/>
-          <a:p>
-            <a:pPr algn="just"/>
-            <a:endParaRPr lang="ca-ES" dirty="0"/>
-          </a:p>
-          <a:p>
-            <a:pPr algn="just"/>
-            <a:endParaRPr lang="ca-ES" dirty="0"/>
-          </a:p>
-        </p:txBody>
-      </p:sp>
-      <p:pic>
-        <p:nvPicPr>
-          <p:cNvPr id="3" name="Imagen 2">
-            <a:extLst>
-              <a:ext uri="{FF2B5EF4-FFF2-40B4-BE49-F238E27FC236}">
-                <a16:creationId xmlns:a16="http://schemas.microsoft.com/office/drawing/2014/main" id="{E7D98387-8AA4-15E6-E936-871AB93C2F3D}"/>
-              </a:ext>
-            </a:extLst>
-          </p:cNvPr>
-          <p:cNvPicPr>
-            <a:picLocks noChangeAspect="1"/>
-          </p:cNvPicPr>
-          <p:nvPr/>
-        </p:nvPicPr>
-        <p:blipFill>
-          <a:blip r:embed="rId2">
-            <a:extLst>
-              <a:ext uri="{28A0092B-C50C-407E-A947-70E740481C1C}">
-                <a14:useLocalDpi xmlns:a14="http://schemas.microsoft.com/office/drawing/2010/main" val="0"/>
-              </a:ext>
-            </a:extLst>
-          </a:blip>
-          <a:stretch>
-            <a:fillRect/>
-          </a:stretch>
-        </p:blipFill>
-        <p:spPr>
-          <a:xfrm>
-            <a:off x="161925" y="38100"/>
-            <a:ext cx="11868150" cy="6781800"/>
-          </a:xfrm>
-          <a:prstGeom prst="rect">
-            <a:avLst/>
-          </a:prstGeom>
-        </p:spPr>
-      </p:pic>
-    </p:spTree>
-    <p:extLst>
-      <p:ext uri="{BB962C8B-B14F-4D97-AF65-F5344CB8AC3E}">
-        <p14:creationId xmlns:p14="http://schemas.microsoft.com/office/powerpoint/2010/main" val="1897978279"/>
-      </p:ext>
-    </p:extLst>
-  </p:cSld>
-  <p:clrMapOvr>
-    <a:masterClrMapping/>
-  </p:clrMapOvr>
-</p:sld>
-</file>
-
-<file path=ppt/slides/slide9.xml><?xml version="1.0" encoding="utf-8"?>
-<p:sld xmlns:a="http://schemas.openxmlformats.org/drawingml/2006/main" xmlns:r="http://schemas.openxmlformats.org/officeDocument/2006/relationships" xmlns:p="http://schemas.openxmlformats.org/presentationml/2006/main">
-  <p:cSld>
-    <p:spTree>
-      <p:nvGrpSpPr>
-        <p:cNvPr id="1" name="">
-          <a:extLst>
-            <a:ext uri="{FF2B5EF4-FFF2-40B4-BE49-F238E27FC236}">
-              <a16:creationId xmlns:a16="http://schemas.microsoft.com/office/drawing/2014/main" id="{776584A6-78D0-ED60-88B0-B6224168F1EE}"/>
-            </a:ext>
-          </a:extLst>
-        </p:cNvPr>
-        <p:cNvGrpSpPr/>
-        <p:nvPr/>
-      </p:nvGrpSpPr>
-      <p:grpSpPr>
-        <a:xfrm>
-          <a:off x="0" y="0"/>
-          <a:ext cx="0" cy="0"/>
-          <a:chOff x="0" y="0"/>
-          <a:chExt cx="0" cy="0"/>
-        </a:xfrm>
-      </p:grpSpPr>
-      <p:sp>
-        <p:nvSpPr>
-          <p:cNvPr id="2" name="Título 1">
-            <a:extLst>
-              <a:ext uri="{FF2B5EF4-FFF2-40B4-BE49-F238E27FC236}">
-                <a16:creationId xmlns:a16="http://schemas.microsoft.com/office/drawing/2014/main" id="{DAECD3C9-7F71-7FBD-321B-A16CDC5F99E0}"/>
-              </a:ext>
-            </a:extLst>
-          </p:cNvPr>
-          <p:cNvSpPr>
-            <a:spLocks noGrp="1"/>
-          </p:cNvSpPr>
-          <p:nvPr>
-            <p:ph type="title"/>
-          </p:nvPr>
-        </p:nvSpPr>
-        <p:spPr/>
-        <p:txBody>
-          <a:bodyPr/>
-          <a:lstStyle/>
-          <a:p>
-            <a:r>
-              <a:rPr lang="ca-ES" dirty="0"/>
-              <a:t>Escollir qui reparteix</a:t>
-            </a:r>
-          </a:p>
-        </p:txBody>
-      </p:sp>
-      <p:sp>
-        <p:nvSpPr>
-          <p:cNvPr id="4" name="Marcador de número de diapositiva 3">
-            <a:extLst>
-              <a:ext uri="{FF2B5EF4-FFF2-40B4-BE49-F238E27FC236}">
-                <a16:creationId xmlns:a16="http://schemas.microsoft.com/office/drawing/2014/main" id="{77617FEE-3784-8494-C3AB-FD9A790550DF}"/>
-              </a:ext>
-            </a:extLst>
-          </p:cNvPr>
-          <p:cNvSpPr>
-            <a:spLocks noGrp="1"/>
-          </p:cNvSpPr>
-          <p:nvPr>
-            <p:ph type="sldNum" sz="quarter" idx="12"/>
-          </p:nvPr>
-        </p:nvSpPr>
-        <p:spPr/>
-        <p:txBody>
-          <a:bodyPr/>
-          <a:lstStyle/>
-          <a:p>
-            <a:fld id="{B2DC25EE-239B-4C5F-AAD1-255A7D5F1EE2}" type="slidenum">
-              <a:rPr lang="en-US" smtClean="0"/>
-              <a:t>9</a:t>
-            </a:fld>
-            <a:endParaRPr lang="en-US" dirty="0"/>
-          </a:p>
-        </p:txBody>
-      </p:sp>
-      <p:pic>
-        <p:nvPicPr>
-          <p:cNvPr id="6" name="Imagen 5">
-            <a:extLst>
-              <a:ext uri="{FF2B5EF4-FFF2-40B4-BE49-F238E27FC236}">
-                <a16:creationId xmlns:a16="http://schemas.microsoft.com/office/drawing/2014/main" id="{D44B66B2-79B4-FD8D-1C0A-E52590D2908F}"/>
-              </a:ext>
-            </a:extLst>
-          </p:cNvPr>
-          <p:cNvPicPr>
-            <a:picLocks noChangeAspect="1"/>
-          </p:cNvPicPr>
-          <p:nvPr/>
-        </p:nvPicPr>
-        <p:blipFill>
-          <a:blip r:embed="rId2"/>
-          <a:stretch>
-            <a:fillRect/>
-          </a:stretch>
-        </p:blipFill>
-        <p:spPr>
-          <a:xfrm>
-            <a:off x="3794431" y="1994822"/>
-            <a:ext cx="4130370" cy="4863178"/>
-          </a:xfrm>
-          <a:prstGeom prst="rect">
-            <a:avLst/>
-          </a:prstGeom>
-        </p:spPr>
-      </p:pic>
-    </p:spTree>
-    <p:extLst>
-      <p:ext uri="{BB962C8B-B14F-4D97-AF65-F5344CB8AC3E}">
-        <p14:creationId xmlns:p14="http://schemas.microsoft.com/office/powerpoint/2010/main" val="1203508239"/>
       </p:ext>
     </p:extLst>
   </p:cSld>
@@ -8015,12 +7750,18 @@
 </file>
 
 <file path=customXml/item1.xml><?xml version="1.0" encoding="utf-8"?>
-<?mso-contentType ?>
-<FormTemplates xmlns="http://schemas.microsoft.com/sharepoint/v3/contenttype/forms">
-  <Display>DocumentLibraryForm</Display>
-  <Edit>DocumentLibraryForm</Edit>
-  <New>DocumentLibraryForm</New>
-</FormTemplates>
+<p:properties xmlns:p="http://schemas.microsoft.com/office/2006/metadata/properties" xmlns:xsi="http://www.w3.org/2001/XMLSchema-instance" xmlns:pc="http://schemas.microsoft.com/office/infopath/2007/PartnerControls">
+  <documentManagement>
+    <SharedWithUsers xmlns="7b814fa0-4f1b-4d56-8a36-064af1e36e66">
+      <UserInfo>
+        <DisplayName/>
+        <AccountId xsi:nil="true"/>
+        <AccountType/>
+      </UserInfo>
+    </SharedWithUsers>
+    <_activity xmlns="b1fa7ccf-aa4f-4f27-84db-07667d020acb" xsi:nil="true"/>
+  </documentManagement>
+</p:properties>
 </file>
 
 <file path=customXml/item2.xml><?xml version="1.0" encoding="utf-8"?>
@@ -8253,24 +7994,27 @@
 </file>
 
 <file path=customXml/item3.xml><?xml version="1.0" encoding="utf-8"?>
-<p:properties xmlns:p="http://schemas.microsoft.com/office/2006/metadata/properties" xmlns:xsi="http://www.w3.org/2001/XMLSchema-instance" xmlns:pc="http://schemas.microsoft.com/office/infopath/2007/PartnerControls">
-  <documentManagement>
-    <SharedWithUsers xmlns="7b814fa0-4f1b-4d56-8a36-064af1e36e66">
-      <UserInfo>
-        <DisplayName/>
-        <AccountId xsi:nil="true"/>
-        <AccountType/>
-      </UserInfo>
-    </SharedWithUsers>
-    <_activity xmlns="b1fa7ccf-aa4f-4f27-84db-07667d020acb" xsi:nil="true"/>
-  </documentManagement>
-</p:properties>
+<?mso-contentType ?>
+<FormTemplates xmlns="http://schemas.microsoft.com/sharepoint/v3/contenttype/forms">
+  <Display>DocumentLibraryForm</Display>
+  <Edit>DocumentLibraryForm</Edit>
+  <New>DocumentLibraryForm</New>
+</FormTemplates>
 </file>
 
 <file path=customXml/itemProps1.xml><?xml version="1.0" encoding="utf-8"?>
-<ds:datastoreItem xmlns:ds="http://schemas.openxmlformats.org/officeDocument/2006/customXml" ds:itemID="{04171512-FDE1-4E49-B7EA-58AD2B333724}">
+<ds:datastoreItem xmlns:ds="http://schemas.openxmlformats.org/officeDocument/2006/customXml" ds:itemID="{4FBF3923-D9E5-4962-BBB8-690B0ABC4F42}">
   <ds:schemaRefs>
-    <ds:schemaRef ds:uri="http://schemas.microsoft.com/sharepoint/v3/contenttype/forms"/>
+    <ds:schemaRef ds:uri="http://www.w3.org/XML/1998/namespace"/>
+    <ds:schemaRef ds:uri="b1fa7ccf-aa4f-4f27-84db-07667d020acb"/>
+    <ds:schemaRef ds:uri="http://schemas.microsoft.com/office/2006/metadata/properties"/>
+    <ds:schemaRef ds:uri="http://schemas.microsoft.com/office/2006/documentManagement/types"/>
+    <ds:schemaRef ds:uri="http://purl.org/dc/elements/1.1/"/>
+    <ds:schemaRef ds:uri="http://schemas.microsoft.com/office/infopath/2007/PartnerControls"/>
+    <ds:schemaRef ds:uri="http://schemas.openxmlformats.org/package/2006/metadata/core-properties"/>
+    <ds:schemaRef ds:uri="7b814fa0-4f1b-4d56-8a36-064af1e36e66"/>
+    <ds:schemaRef ds:uri="http://purl.org/dc/dcmitype/"/>
+    <ds:schemaRef ds:uri="http://purl.org/dc/terms/"/>
   </ds:schemaRefs>
 </ds:datastoreItem>
 </file>
@@ -8295,18 +8039,9 @@
 </file>
 
 <file path=customXml/itemProps3.xml><?xml version="1.0" encoding="utf-8"?>
-<ds:datastoreItem xmlns:ds="http://schemas.openxmlformats.org/officeDocument/2006/customXml" ds:itemID="{4FBF3923-D9E5-4962-BBB8-690B0ABC4F42}">
+<ds:datastoreItem xmlns:ds="http://schemas.openxmlformats.org/officeDocument/2006/customXml" ds:itemID="{04171512-FDE1-4E49-B7EA-58AD2B333724}">
   <ds:schemaRefs>
-    <ds:schemaRef ds:uri="http://www.w3.org/XML/1998/namespace"/>
-    <ds:schemaRef ds:uri="b1fa7ccf-aa4f-4f27-84db-07667d020acb"/>
-    <ds:schemaRef ds:uri="http://schemas.microsoft.com/office/2006/metadata/properties"/>
-    <ds:schemaRef ds:uri="http://schemas.microsoft.com/office/2006/documentManagement/types"/>
-    <ds:schemaRef ds:uri="http://purl.org/dc/elements/1.1/"/>
-    <ds:schemaRef ds:uri="http://schemas.microsoft.com/office/infopath/2007/PartnerControls"/>
-    <ds:schemaRef ds:uri="http://schemas.openxmlformats.org/package/2006/metadata/core-properties"/>
-    <ds:schemaRef ds:uri="7b814fa0-4f1b-4d56-8a36-064af1e36e66"/>
-    <ds:schemaRef ds:uri="http://purl.org/dc/dcmitype/"/>
-    <ds:schemaRef ds:uri="http://purl.org/dc/terms/"/>
+    <ds:schemaRef ds:uri="http://schemas.microsoft.com/sharepoint/v3/contenttype/forms"/>
   </ds:schemaRefs>
 </ds:datastoreItem>
 </file>
--- a/ENTREGA FINAL/4. Diagramas de secuencia/Marc Sala.pptx
+++ b/ENTREGA FINAL/4. Diagramas de secuencia/Marc Sala.pptx
@@ -6561,10 +6561,10 @@
       </p:sp>
       <p:pic>
         <p:nvPicPr>
-          <p:cNvPr id="3" name="Imagen 2">
-            <a:extLst>
-              <a:ext uri="{FF2B5EF4-FFF2-40B4-BE49-F238E27FC236}">
-                <a16:creationId xmlns:a16="http://schemas.microsoft.com/office/drawing/2014/main" id="{D26B1A8C-2479-2DB9-9DD8-73D905AB0AD9}"/>
+          <p:cNvPr id="5" name="Imagen 4">
+            <a:extLst>
+              <a:ext uri="{FF2B5EF4-FFF2-40B4-BE49-F238E27FC236}">
+                <a16:creationId xmlns:a16="http://schemas.microsoft.com/office/drawing/2014/main" id="{2A84785A-4A3D-DF1B-0CB2-A04A1F357984}"/>
               </a:ext>
             </a:extLst>
           </p:cNvPr>
@@ -6587,8 +6587,8 @@
         </p:blipFill>
         <p:spPr>
           <a:xfrm>
-            <a:off x="581025" y="223837"/>
-            <a:ext cx="11029950" cy="6410325"/>
+            <a:off x="1163515" y="0"/>
+            <a:ext cx="9864969" cy="6858000"/>
           </a:xfrm>
           <a:prstGeom prst="rect">
             <a:avLst/>
@@ -6822,10 +6822,10 @@
       </p:sp>
       <p:pic>
         <p:nvPicPr>
-          <p:cNvPr id="3" name="Imagen 2">
-            <a:extLst>
-              <a:ext uri="{FF2B5EF4-FFF2-40B4-BE49-F238E27FC236}">
-                <a16:creationId xmlns:a16="http://schemas.microsoft.com/office/drawing/2014/main" id="{E7D98387-8AA4-15E6-E936-871AB93C2F3D}"/>
+          <p:cNvPr id="5" name="Imagen 4">
+            <a:extLst>
+              <a:ext uri="{FF2B5EF4-FFF2-40B4-BE49-F238E27FC236}">
+                <a16:creationId xmlns:a16="http://schemas.microsoft.com/office/drawing/2014/main" id="{7034F93E-29F2-9ED8-D2FD-A5A7DC03424B}"/>
               </a:ext>
             </a:extLst>
           </p:cNvPr>
@@ -6848,8 +6848,8 @@
         </p:blipFill>
         <p:spPr>
           <a:xfrm>
-            <a:off x="161925" y="38100"/>
-            <a:ext cx="11868150" cy="6781800"/>
+            <a:off x="161925" y="247650"/>
+            <a:ext cx="11868150" cy="6362700"/>
           </a:xfrm>
           <a:prstGeom prst="rect">
             <a:avLst/>
@@ -7083,10 +7083,10 @@
       </p:sp>
       <p:pic>
         <p:nvPicPr>
-          <p:cNvPr id="3" name="Imagen 2">
-            <a:extLst>
-              <a:ext uri="{FF2B5EF4-FFF2-40B4-BE49-F238E27FC236}">
-                <a16:creationId xmlns:a16="http://schemas.microsoft.com/office/drawing/2014/main" id="{F3E27BD8-8BD6-AC9C-E951-76C9C3523B49}"/>
+          <p:cNvPr id="5" name="Imagen 4">
+            <a:extLst>
+              <a:ext uri="{FF2B5EF4-FFF2-40B4-BE49-F238E27FC236}">
+                <a16:creationId xmlns:a16="http://schemas.microsoft.com/office/drawing/2014/main" id="{1DEE1CAB-CB4B-B465-FD67-6998B00277C0}"/>
               </a:ext>
             </a:extLst>
           </p:cNvPr>
@@ -7109,8 +7109,8 @@
         </p:blipFill>
         <p:spPr>
           <a:xfrm>
-            <a:off x="1055500" y="0"/>
-            <a:ext cx="10080999" cy="6858000"/>
+            <a:off x="881006" y="0"/>
+            <a:ext cx="10429987" cy="6858000"/>
           </a:xfrm>
           <a:prstGeom prst="rect">
             <a:avLst/>
@@ -7750,21 +7750,6 @@
 </file>
 
 <file path=customXml/item1.xml><?xml version="1.0" encoding="utf-8"?>
-<p:properties xmlns:p="http://schemas.microsoft.com/office/2006/metadata/properties" xmlns:xsi="http://www.w3.org/2001/XMLSchema-instance" xmlns:pc="http://schemas.microsoft.com/office/infopath/2007/PartnerControls">
-  <documentManagement>
-    <SharedWithUsers xmlns="7b814fa0-4f1b-4d56-8a36-064af1e36e66">
-      <UserInfo>
-        <DisplayName/>
-        <AccountId xsi:nil="true"/>
-        <AccountType/>
-      </UserInfo>
-    </SharedWithUsers>
-    <_activity xmlns="b1fa7ccf-aa4f-4f27-84db-07667d020acb" xsi:nil="true"/>
-  </documentManagement>
-</p:properties>
-</file>
-
-<file path=customXml/item2.xml><?xml version="1.0" encoding="utf-8"?>
 <ct:contentTypeSchema xmlns:ct="http://schemas.microsoft.com/office/2006/metadata/contentType" xmlns:ma="http://schemas.microsoft.com/office/2006/metadata/properties/metaAttributes" ct:_="" ma:_="" ma:contentTypeName="Documento" ma:contentTypeID="0x01010063BD3DC6F0E81D4FA56575A4B7B24AF5" ma:contentTypeVersion="14" ma:contentTypeDescription="Crear nuevo documento." ma:contentTypeScope="" ma:versionID="ded3d347f3a98b31a82ee0cc093f824b">
   <xsd:schema xmlns:xsd="http://www.w3.org/2001/XMLSchema" xmlns:xs="http://www.w3.org/2001/XMLSchema" xmlns:p="http://schemas.microsoft.com/office/2006/metadata/properties" xmlns:ns3="7b814fa0-4f1b-4d56-8a36-064af1e36e66" xmlns:ns4="b1fa7ccf-aa4f-4f27-84db-07667d020acb" targetNamespace="http://schemas.microsoft.com/office/2006/metadata/properties" ma:root="true" ma:fieldsID="fe3adeea5df1e60fd0d7c7fb86895927" ns3:_="" ns4:_="">
     <xsd:import namespace="7b814fa0-4f1b-4d56-8a36-064af1e36e66"/>
@@ -7993,6 +7978,21 @@
 </ct:contentTypeSchema>
 </file>
 
+<file path=customXml/item2.xml><?xml version="1.0" encoding="utf-8"?>
+<p:properties xmlns:p="http://schemas.microsoft.com/office/2006/metadata/properties" xmlns:xsi="http://www.w3.org/2001/XMLSchema-instance" xmlns:pc="http://schemas.microsoft.com/office/infopath/2007/PartnerControls">
+  <documentManagement>
+    <SharedWithUsers xmlns="7b814fa0-4f1b-4d56-8a36-064af1e36e66">
+      <UserInfo>
+        <DisplayName/>
+        <AccountId xsi:nil="true"/>
+        <AccountType/>
+      </UserInfo>
+    </SharedWithUsers>
+    <_activity xmlns="b1fa7ccf-aa4f-4f27-84db-07667d020acb" xsi:nil="true"/>
+  </documentManagement>
+</p:properties>
+</file>
+
 <file path=customXml/item3.xml><?xml version="1.0" encoding="utf-8"?>
 <?mso-contentType ?>
 <FormTemplates xmlns="http://schemas.microsoft.com/sharepoint/v3/contenttype/forms">
@@ -8003,23 +8003,6 @@
 </file>
 
 <file path=customXml/itemProps1.xml><?xml version="1.0" encoding="utf-8"?>
-<ds:datastoreItem xmlns:ds="http://schemas.openxmlformats.org/officeDocument/2006/customXml" ds:itemID="{4FBF3923-D9E5-4962-BBB8-690B0ABC4F42}">
-  <ds:schemaRefs>
-    <ds:schemaRef ds:uri="http://www.w3.org/XML/1998/namespace"/>
-    <ds:schemaRef ds:uri="b1fa7ccf-aa4f-4f27-84db-07667d020acb"/>
-    <ds:schemaRef ds:uri="http://schemas.microsoft.com/office/2006/metadata/properties"/>
-    <ds:schemaRef ds:uri="http://schemas.microsoft.com/office/2006/documentManagement/types"/>
-    <ds:schemaRef ds:uri="http://purl.org/dc/elements/1.1/"/>
-    <ds:schemaRef ds:uri="http://schemas.microsoft.com/office/infopath/2007/PartnerControls"/>
-    <ds:schemaRef ds:uri="http://schemas.openxmlformats.org/package/2006/metadata/core-properties"/>
-    <ds:schemaRef ds:uri="7b814fa0-4f1b-4d56-8a36-064af1e36e66"/>
-    <ds:schemaRef ds:uri="http://purl.org/dc/dcmitype/"/>
-    <ds:schemaRef ds:uri="http://purl.org/dc/terms/"/>
-  </ds:schemaRefs>
-</ds:datastoreItem>
-</file>
-
-<file path=customXml/itemProps2.xml><?xml version="1.0" encoding="utf-8"?>
 <ds:datastoreItem xmlns:ds="http://schemas.openxmlformats.org/officeDocument/2006/customXml" ds:itemID="{E77A2FCE-FB77-4A2D-98B9-B8BD51BEE8CE}">
   <ds:schemaRefs>
     <ds:schemaRef ds:uri="http://schemas.microsoft.com/office/2006/metadata/contentType"/>
@@ -8038,6 +8021,23 @@
 </ds:datastoreItem>
 </file>
 
+<file path=customXml/itemProps2.xml><?xml version="1.0" encoding="utf-8"?>
+<ds:datastoreItem xmlns:ds="http://schemas.openxmlformats.org/officeDocument/2006/customXml" ds:itemID="{4FBF3923-D9E5-4962-BBB8-690B0ABC4F42}">
+  <ds:schemaRefs>
+    <ds:schemaRef ds:uri="http://www.w3.org/XML/1998/namespace"/>
+    <ds:schemaRef ds:uri="b1fa7ccf-aa4f-4f27-84db-07667d020acb"/>
+    <ds:schemaRef ds:uri="http://schemas.microsoft.com/office/2006/metadata/properties"/>
+    <ds:schemaRef ds:uri="http://schemas.microsoft.com/office/2006/documentManagement/types"/>
+    <ds:schemaRef ds:uri="http://purl.org/dc/elements/1.1/"/>
+    <ds:schemaRef ds:uri="http://schemas.microsoft.com/office/infopath/2007/PartnerControls"/>
+    <ds:schemaRef ds:uri="http://schemas.openxmlformats.org/package/2006/metadata/core-properties"/>
+    <ds:schemaRef ds:uri="7b814fa0-4f1b-4d56-8a36-064af1e36e66"/>
+    <ds:schemaRef ds:uri="http://purl.org/dc/dcmitype/"/>
+    <ds:schemaRef ds:uri="http://purl.org/dc/terms/"/>
+  </ds:schemaRefs>
+</ds:datastoreItem>
+</file>
+
 <file path=customXml/itemProps3.xml><?xml version="1.0" encoding="utf-8"?>
 <ds:datastoreItem xmlns:ds="http://schemas.openxmlformats.org/officeDocument/2006/customXml" ds:itemID="{04171512-FDE1-4E49-B7EA-58AD2B333724}">
   <ds:schemaRefs>
